--- a/figs/VEST_thrusts.pptx
+++ b/figs/VEST_thrusts.pptx
@@ -7,14 +7,14 @@
   <p:sldIdLst>
     <p:sldId id="256" r:id="rId2"/>
   </p:sldIdLst>
-  <p:sldSz cx="12192000" cy="6858000"/>
+  <p:sldSz cx="11337925" cy="2835275"/>
   <p:notesSz cx="6858000" cy="9144000"/>
   <p:defaultTextStyle>
     <a:defPPr>
       <a:defRPr lang="en-US"/>
     </a:defPPr>
-    <a:lvl1pPr marL="0" algn="l" defTabSz="457200" rtl="0" eaLnBrk="1" latinLnBrk="0" hangingPunct="1">
-      <a:defRPr sz="1800" kern="1200">
+    <a:lvl1pPr marL="0" algn="l" defTabSz="340085" rtl="0" eaLnBrk="1" latinLnBrk="0" hangingPunct="1">
+      <a:defRPr sz="1339" kern="1200">
         <a:solidFill>
           <a:schemeClr val="tx1"/>
         </a:solidFill>
@@ -23,8 +23,8 @@
         <a:cs typeface="+mn-cs"/>
       </a:defRPr>
     </a:lvl1pPr>
-    <a:lvl2pPr marL="457200" algn="l" defTabSz="457200" rtl="0" eaLnBrk="1" latinLnBrk="0" hangingPunct="1">
-      <a:defRPr sz="1800" kern="1200">
+    <a:lvl2pPr marL="340085" algn="l" defTabSz="340085" rtl="0" eaLnBrk="1" latinLnBrk="0" hangingPunct="1">
+      <a:defRPr sz="1339" kern="1200">
         <a:solidFill>
           <a:schemeClr val="tx1"/>
         </a:solidFill>
@@ -33,8 +33,8 @@
         <a:cs typeface="+mn-cs"/>
       </a:defRPr>
     </a:lvl2pPr>
-    <a:lvl3pPr marL="914400" algn="l" defTabSz="457200" rtl="0" eaLnBrk="1" latinLnBrk="0" hangingPunct="1">
-      <a:defRPr sz="1800" kern="1200">
+    <a:lvl3pPr marL="680170" algn="l" defTabSz="340085" rtl="0" eaLnBrk="1" latinLnBrk="0" hangingPunct="1">
+      <a:defRPr sz="1339" kern="1200">
         <a:solidFill>
           <a:schemeClr val="tx1"/>
         </a:solidFill>
@@ -43,8 +43,8 @@
         <a:cs typeface="+mn-cs"/>
       </a:defRPr>
     </a:lvl3pPr>
-    <a:lvl4pPr marL="1371600" algn="l" defTabSz="457200" rtl="0" eaLnBrk="1" latinLnBrk="0" hangingPunct="1">
-      <a:defRPr sz="1800" kern="1200">
+    <a:lvl4pPr marL="1020250" algn="l" defTabSz="340085" rtl="0" eaLnBrk="1" latinLnBrk="0" hangingPunct="1">
+      <a:defRPr sz="1339" kern="1200">
         <a:solidFill>
           <a:schemeClr val="tx1"/>
         </a:solidFill>
@@ -53,8 +53,8 @@
         <a:cs typeface="+mn-cs"/>
       </a:defRPr>
     </a:lvl4pPr>
-    <a:lvl5pPr marL="1828800" algn="l" defTabSz="457200" rtl="0" eaLnBrk="1" latinLnBrk="0" hangingPunct="1">
-      <a:defRPr sz="1800" kern="1200">
+    <a:lvl5pPr marL="1360337" algn="l" defTabSz="340085" rtl="0" eaLnBrk="1" latinLnBrk="0" hangingPunct="1">
+      <a:defRPr sz="1339" kern="1200">
         <a:solidFill>
           <a:schemeClr val="tx1"/>
         </a:solidFill>
@@ -63,8 +63,8 @@
         <a:cs typeface="+mn-cs"/>
       </a:defRPr>
     </a:lvl5pPr>
-    <a:lvl6pPr marL="2286000" algn="l" defTabSz="457200" rtl="0" eaLnBrk="1" latinLnBrk="0" hangingPunct="1">
-      <a:defRPr sz="1800" kern="1200">
+    <a:lvl6pPr marL="1700419" algn="l" defTabSz="340085" rtl="0" eaLnBrk="1" latinLnBrk="0" hangingPunct="1">
+      <a:defRPr sz="1339" kern="1200">
         <a:solidFill>
           <a:schemeClr val="tx1"/>
         </a:solidFill>
@@ -73,8 +73,8 @@
         <a:cs typeface="+mn-cs"/>
       </a:defRPr>
     </a:lvl6pPr>
-    <a:lvl7pPr marL="2743200" algn="l" defTabSz="457200" rtl="0" eaLnBrk="1" latinLnBrk="0" hangingPunct="1">
-      <a:defRPr sz="1800" kern="1200">
+    <a:lvl7pPr marL="2040504" algn="l" defTabSz="340085" rtl="0" eaLnBrk="1" latinLnBrk="0" hangingPunct="1">
+      <a:defRPr sz="1339" kern="1200">
         <a:solidFill>
           <a:schemeClr val="tx1"/>
         </a:solidFill>
@@ -83,8 +83,8 @@
         <a:cs typeface="+mn-cs"/>
       </a:defRPr>
     </a:lvl7pPr>
-    <a:lvl8pPr marL="3200400" algn="l" defTabSz="457200" rtl="0" eaLnBrk="1" latinLnBrk="0" hangingPunct="1">
-      <a:defRPr sz="1800" kern="1200">
+    <a:lvl8pPr marL="2380587" algn="l" defTabSz="340085" rtl="0" eaLnBrk="1" latinLnBrk="0" hangingPunct="1">
+      <a:defRPr sz="1339" kern="1200">
         <a:solidFill>
           <a:schemeClr val="tx1"/>
         </a:solidFill>
@@ -93,8 +93,8 @@
         <a:cs typeface="+mn-cs"/>
       </a:defRPr>
     </a:lvl8pPr>
-    <a:lvl9pPr marL="3657600" algn="l" defTabSz="457200" rtl="0" eaLnBrk="1" latinLnBrk="0" hangingPunct="1">
-      <a:defRPr sz="1800" kern="1200">
+    <a:lvl9pPr marL="2720672" algn="l" defTabSz="340085" rtl="0" eaLnBrk="1" latinLnBrk="0" hangingPunct="1">
+      <a:defRPr sz="1339" kern="1200">
         <a:solidFill>
           <a:schemeClr val="tx1"/>
         </a:solidFill>
@@ -107,12 +107,12 @@
   <p:extLst>
     <p:ext uri="{EFAFB233-063F-42B5-8137-9DF3F51BA10A}">
       <p15:sldGuideLst xmlns:p15="http://schemas.microsoft.com/office/powerpoint/2012/main">
-        <p15:guide id="1" orient="horz" pos="2160">
+        <p15:guide id="1" orient="horz" pos="893" userDrawn="1">
           <p15:clr>
             <a:srgbClr val="A4A3A4"/>
           </p15:clr>
         </p15:guide>
-        <p15:guide id="2" pos="2880">
+        <p15:guide id="2" pos="2678" userDrawn="1">
           <p15:clr>
             <a:srgbClr val="A4A3A4"/>
           </p15:clr>
@@ -152,8 +152,8 @@
         </p:nvSpPr>
         <p:spPr>
           <a:xfrm>
-            <a:off x="685800" y="2130425"/>
-            <a:ext cx="7772400" cy="1470025"/>
+            <a:off x="637762" y="880775"/>
+            <a:ext cx="7227927" cy="607746"/>
           </a:xfrm>
         </p:spPr>
         <p:txBody>
@@ -179,8 +179,8 @@
         </p:nvSpPr>
         <p:spPr>
           <a:xfrm>
-            <a:off x="1371600" y="3886200"/>
-            <a:ext cx="6400800" cy="1752600"/>
+            <a:off x="1275520" y="1606656"/>
+            <a:ext cx="5952411" cy="724570"/>
           </a:xfrm>
         </p:spPr>
         <p:txBody>
@@ -196,7 +196,7 @@
                 </a:solidFill>
               </a:defRPr>
             </a:lvl1pPr>
-            <a:lvl2pPr marL="457200" indent="0" algn="ctr">
+            <a:lvl2pPr marL="472557" indent="0" algn="ctr">
               <a:buNone/>
               <a:defRPr>
                 <a:solidFill>
@@ -206,7 +206,7 @@
                 </a:solidFill>
               </a:defRPr>
             </a:lvl2pPr>
-            <a:lvl3pPr marL="914400" indent="0" algn="ctr">
+            <a:lvl3pPr marL="945115" indent="0" algn="ctr">
               <a:buNone/>
               <a:defRPr>
                 <a:solidFill>
@@ -216,7 +216,7 @@
                 </a:solidFill>
               </a:defRPr>
             </a:lvl3pPr>
-            <a:lvl4pPr marL="1371600" indent="0" algn="ctr">
+            <a:lvl4pPr marL="1417671" indent="0" algn="ctr">
               <a:buNone/>
               <a:defRPr>
                 <a:solidFill>
@@ -226,7 +226,7 @@
                 </a:solidFill>
               </a:defRPr>
             </a:lvl4pPr>
-            <a:lvl5pPr marL="1828800" indent="0" algn="ctr">
+            <a:lvl5pPr marL="1890229" indent="0" algn="ctr">
               <a:buNone/>
               <a:defRPr>
                 <a:solidFill>
@@ -236,7 +236,7 @@
                 </a:solidFill>
               </a:defRPr>
             </a:lvl5pPr>
-            <a:lvl6pPr marL="2286000" indent="0" algn="ctr">
+            <a:lvl6pPr marL="2362786" indent="0" algn="ctr">
               <a:buNone/>
               <a:defRPr>
                 <a:solidFill>
@@ -246,7 +246,7 @@
                 </a:solidFill>
               </a:defRPr>
             </a:lvl6pPr>
-            <a:lvl7pPr marL="2743200" indent="0" algn="ctr">
+            <a:lvl7pPr marL="2835344" indent="0" algn="ctr">
               <a:buNone/>
               <a:defRPr>
                 <a:solidFill>
@@ -256,7 +256,7 @@
                 </a:solidFill>
               </a:defRPr>
             </a:lvl7pPr>
-            <a:lvl8pPr marL="3200400" indent="0" algn="ctr">
+            <a:lvl8pPr marL="3307900" indent="0" algn="ctr">
               <a:buNone/>
               <a:defRPr>
                 <a:solidFill>
@@ -266,7 +266,7 @@
                 </a:solidFill>
               </a:defRPr>
             </a:lvl8pPr>
-            <a:lvl9pPr marL="3657600" indent="0" algn="ctr">
+            <a:lvl9pPr marL="3780457" indent="0" algn="ctr">
               <a:buNone/>
               <a:defRPr>
                 <a:solidFill>
@@ -560,8 +560,8 @@
         </p:nvSpPr>
         <p:spPr>
           <a:xfrm>
-            <a:off x="6629400" y="274638"/>
-            <a:ext cx="2057400" cy="5851525"/>
+            <a:off x="6165002" y="113544"/>
+            <a:ext cx="1913275" cy="2419172"/>
           </a:xfrm>
         </p:spPr>
         <p:txBody>
@@ -587,8 +587,8 @@
         </p:nvSpPr>
         <p:spPr>
           <a:xfrm>
-            <a:off x="457200" y="274638"/>
-            <a:ext cx="6019800" cy="5851525"/>
+            <a:off x="425173" y="113544"/>
+            <a:ext cx="5598101" cy="2419172"/>
           </a:xfrm>
         </p:spPr>
         <p:txBody>
@@ -906,15 +906,15 @@
         </p:nvSpPr>
         <p:spPr>
           <a:xfrm>
-            <a:off x="722313" y="4406900"/>
-            <a:ext cx="7772400" cy="1362075"/>
+            <a:off x="671719" y="1821927"/>
+            <a:ext cx="7227927" cy="563117"/>
           </a:xfrm>
         </p:spPr>
         <p:txBody>
           <a:bodyPr anchor="t"/>
           <a:lstStyle>
             <a:lvl1pPr algn="l">
-              <a:defRPr sz="4000" b="1" cap="all"/>
+              <a:defRPr sz="4134" b="1" cap="all"/>
             </a:lvl1pPr>
           </a:lstStyle>
           <a:p>
@@ -937,8 +937,8 @@
         </p:nvSpPr>
         <p:spPr>
           <a:xfrm>
-            <a:off x="722313" y="2906713"/>
-            <a:ext cx="7772400" cy="1500187"/>
+            <a:off x="671719" y="1201713"/>
+            <a:ext cx="7227927" cy="620216"/>
           </a:xfrm>
         </p:spPr>
         <p:txBody>
@@ -946,7 +946,7 @@
           <a:lstStyle>
             <a:lvl1pPr marL="0" indent="0">
               <a:buNone/>
-              <a:defRPr sz="2000">
+              <a:defRPr sz="2067">
                 <a:solidFill>
                   <a:schemeClr val="tx1">
                     <a:tint val="75000"/>
@@ -954,9 +954,9 @@
                 </a:solidFill>
               </a:defRPr>
             </a:lvl1pPr>
-            <a:lvl2pPr marL="457200" indent="0">
-              <a:buNone/>
-              <a:defRPr sz="1800">
+            <a:lvl2pPr marL="472557" indent="0">
+              <a:buNone/>
+              <a:defRPr sz="1860">
                 <a:solidFill>
                   <a:schemeClr val="tx1">
                     <a:tint val="75000"/>
@@ -964,9 +964,9 @@
                 </a:solidFill>
               </a:defRPr>
             </a:lvl2pPr>
-            <a:lvl3pPr marL="914400" indent="0">
-              <a:buNone/>
-              <a:defRPr sz="1600">
+            <a:lvl3pPr marL="945115" indent="0">
+              <a:buNone/>
+              <a:defRPr sz="1654">
                 <a:solidFill>
                   <a:schemeClr val="tx1">
                     <a:tint val="75000"/>
@@ -974,9 +974,9 @@
                 </a:solidFill>
               </a:defRPr>
             </a:lvl3pPr>
-            <a:lvl4pPr marL="1371600" indent="0">
-              <a:buNone/>
-              <a:defRPr sz="1400">
+            <a:lvl4pPr marL="1417671" indent="0">
+              <a:buNone/>
+              <a:defRPr sz="1447">
                 <a:solidFill>
                   <a:schemeClr val="tx1">
                     <a:tint val="75000"/>
@@ -984,9 +984,9 @@
                 </a:solidFill>
               </a:defRPr>
             </a:lvl4pPr>
-            <a:lvl5pPr marL="1828800" indent="0">
-              <a:buNone/>
-              <a:defRPr sz="1400">
+            <a:lvl5pPr marL="1890229" indent="0">
+              <a:buNone/>
+              <a:defRPr sz="1447">
                 <a:solidFill>
                   <a:schemeClr val="tx1">
                     <a:tint val="75000"/>
@@ -994,9 +994,9 @@
                 </a:solidFill>
               </a:defRPr>
             </a:lvl5pPr>
-            <a:lvl6pPr marL="2286000" indent="0">
-              <a:buNone/>
-              <a:defRPr sz="1400">
+            <a:lvl6pPr marL="2362786" indent="0">
+              <a:buNone/>
+              <a:defRPr sz="1447">
                 <a:solidFill>
                   <a:schemeClr val="tx1">
                     <a:tint val="75000"/>
@@ -1004,9 +1004,9 @@
                 </a:solidFill>
               </a:defRPr>
             </a:lvl6pPr>
-            <a:lvl7pPr marL="2743200" indent="0">
-              <a:buNone/>
-              <a:defRPr sz="1400">
+            <a:lvl7pPr marL="2835344" indent="0">
+              <a:buNone/>
+              <a:defRPr sz="1447">
                 <a:solidFill>
                   <a:schemeClr val="tx1">
                     <a:tint val="75000"/>
@@ -1014,9 +1014,9 @@
                 </a:solidFill>
               </a:defRPr>
             </a:lvl7pPr>
-            <a:lvl8pPr marL="3200400" indent="0">
-              <a:buNone/>
-              <a:defRPr sz="1400">
+            <a:lvl8pPr marL="3307900" indent="0">
+              <a:buNone/>
+              <a:defRPr sz="1447">
                 <a:solidFill>
                   <a:schemeClr val="tx1">
                     <a:tint val="75000"/>
@@ -1024,9 +1024,9 @@
                 </a:solidFill>
               </a:defRPr>
             </a:lvl8pPr>
-            <a:lvl9pPr marL="3657600" indent="0">
-              <a:buNone/>
-              <a:defRPr sz="1400">
+            <a:lvl9pPr marL="3780457" indent="0">
+              <a:buNone/>
+              <a:defRPr sz="1447">
                 <a:solidFill>
                   <a:schemeClr val="tx1">
                     <a:tint val="75000"/>
@@ -1173,39 +1173,39 @@
         </p:nvSpPr>
         <p:spPr>
           <a:xfrm>
-            <a:off x="457200" y="1600200"/>
-            <a:ext cx="4038600" cy="4525963"/>
+            <a:off x="425172" y="661569"/>
+            <a:ext cx="3755688" cy="1871150"/>
           </a:xfrm>
         </p:spPr>
         <p:txBody>
           <a:bodyPr/>
           <a:lstStyle>
             <a:lvl1pPr>
-              <a:defRPr sz="2800"/>
+              <a:defRPr sz="2894"/>
             </a:lvl1pPr>
             <a:lvl2pPr>
-              <a:defRPr sz="2400"/>
+              <a:defRPr sz="2481"/>
             </a:lvl2pPr>
             <a:lvl3pPr>
-              <a:defRPr sz="2000"/>
+              <a:defRPr sz="2067"/>
             </a:lvl3pPr>
             <a:lvl4pPr>
-              <a:defRPr sz="1800"/>
+              <a:defRPr sz="1860"/>
             </a:lvl4pPr>
             <a:lvl5pPr>
-              <a:defRPr sz="1800"/>
+              <a:defRPr sz="1860"/>
             </a:lvl5pPr>
             <a:lvl6pPr>
-              <a:defRPr sz="1800"/>
+              <a:defRPr sz="1860"/>
             </a:lvl6pPr>
             <a:lvl7pPr>
-              <a:defRPr sz="1800"/>
+              <a:defRPr sz="1860"/>
             </a:lvl7pPr>
             <a:lvl8pPr>
-              <a:defRPr sz="1800"/>
+              <a:defRPr sz="1860"/>
             </a:lvl8pPr>
             <a:lvl9pPr>
-              <a:defRPr sz="1800"/>
+              <a:defRPr sz="1860"/>
             </a:lvl9pPr>
           </a:lstStyle>
           <a:p>
@@ -1257,39 +1257,39 @@
         </p:nvSpPr>
         <p:spPr>
           <a:xfrm>
-            <a:off x="4648200" y="1600200"/>
-            <a:ext cx="4038600" cy="4525963"/>
+            <a:off x="4322584" y="661569"/>
+            <a:ext cx="3755688" cy="1871150"/>
           </a:xfrm>
         </p:spPr>
         <p:txBody>
           <a:bodyPr/>
           <a:lstStyle>
             <a:lvl1pPr>
-              <a:defRPr sz="2800"/>
+              <a:defRPr sz="2894"/>
             </a:lvl1pPr>
             <a:lvl2pPr>
-              <a:defRPr sz="2400"/>
+              <a:defRPr sz="2481"/>
             </a:lvl2pPr>
             <a:lvl3pPr>
-              <a:defRPr sz="2000"/>
+              <a:defRPr sz="2067"/>
             </a:lvl3pPr>
             <a:lvl4pPr>
-              <a:defRPr sz="1800"/>
+              <a:defRPr sz="1860"/>
             </a:lvl4pPr>
             <a:lvl5pPr>
-              <a:defRPr sz="1800"/>
+              <a:defRPr sz="1860"/>
             </a:lvl5pPr>
             <a:lvl6pPr>
-              <a:defRPr sz="1800"/>
+              <a:defRPr sz="1860"/>
             </a:lvl6pPr>
             <a:lvl7pPr>
-              <a:defRPr sz="1800"/>
+              <a:defRPr sz="1860"/>
             </a:lvl7pPr>
             <a:lvl8pPr>
-              <a:defRPr sz="1800"/>
+              <a:defRPr sz="1860"/>
             </a:lvl8pPr>
             <a:lvl9pPr>
-              <a:defRPr sz="1800"/>
+              <a:defRPr sz="1860"/>
             </a:lvl9pPr>
           </a:lstStyle>
           <a:p>
@@ -1462,8 +1462,8 @@
         </p:nvSpPr>
         <p:spPr>
           <a:xfrm>
-            <a:off x="457200" y="1535113"/>
-            <a:ext cx="4040188" cy="639762"/>
+            <a:off x="425179" y="634660"/>
+            <a:ext cx="3757165" cy="264494"/>
           </a:xfrm>
         </p:spPr>
         <p:txBody>
@@ -1471,39 +1471,39 @@
           <a:lstStyle>
             <a:lvl1pPr marL="0" indent="0">
               <a:buNone/>
-              <a:defRPr sz="2400" b="1"/>
+              <a:defRPr sz="2481" b="1"/>
             </a:lvl1pPr>
-            <a:lvl2pPr marL="457200" indent="0">
-              <a:buNone/>
-              <a:defRPr sz="2000" b="1"/>
+            <a:lvl2pPr marL="472557" indent="0">
+              <a:buNone/>
+              <a:defRPr sz="2067" b="1"/>
             </a:lvl2pPr>
-            <a:lvl3pPr marL="914400" indent="0">
-              <a:buNone/>
-              <a:defRPr sz="1800" b="1"/>
+            <a:lvl3pPr marL="945115" indent="0">
+              <a:buNone/>
+              <a:defRPr sz="1860" b="1"/>
             </a:lvl3pPr>
-            <a:lvl4pPr marL="1371600" indent="0">
-              <a:buNone/>
-              <a:defRPr sz="1600" b="1"/>
+            <a:lvl4pPr marL="1417671" indent="0">
+              <a:buNone/>
+              <a:defRPr sz="1654" b="1"/>
             </a:lvl4pPr>
-            <a:lvl5pPr marL="1828800" indent="0">
-              <a:buNone/>
-              <a:defRPr sz="1600" b="1"/>
+            <a:lvl5pPr marL="1890229" indent="0">
+              <a:buNone/>
+              <a:defRPr sz="1654" b="1"/>
             </a:lvl5pPr>
-            <a:lvl6pPr marL="2286000" indent="0">
-              <a:buNone/>
-              <a:defRPr sz="1600" b="1"/>
+            <a:lvl6pPr marL="2362786" indent="0">
+              <a:buNone/>
+              <a:defRPr sz="1654" b="1"/>
             </a:lvl6pPr>
-            <a:lvl7pPr marL="2743200" indent="0">
-              <a:buNone/>
-              <a:defRPr sz="1600" b="1"/>
+            <a:lvl7pPr marL="2835344" indent="0">
+              <a:buNone/>
+              <a:defRPr sz="1654" b="1"/>
             </a:lvl7pPr>
-            <a:lvl8pPr marL="3200400" indent="0">
-              <a:buNone/>
-              <a:defRPr sz="1600" b="1"/>
+            <a:lvl8pPr marL="3307900" indent="0">
+              <a:buNone/>
+              <a:defRPr sz="1654" b="1"/>
             </a:lvl8pPr>
-            <a:lvl9pPr marL="3657600" indent="0">
-              <a:buNone/>
-              <a:defRPr sz="1600" b="1"/>
+            <a:lvl9pPr marL="3780457" indent="0">
+              <a:buNone/>
+              <a:defRPr sz="1654" b="1"/>
             </a:lvl9pPr>
           </a:lstStyle>
           <a:p>
@@ -1527,39 +1527,39 @@
         </p:nvSpPr>
         <p:spPr>
           <a:xfrm>
-            <a:off x="457200" y="2174875"/>
-            <a:ext cx="4040188" cy="3951288"/>
+            <a:off x="425179" y="899151"/>
+            <a:ext cx="3757165" cy="1633566"/>
           </a:xfrm>
         </p:spPr>
         <p:txBody>
           <a:bodyPr/>
           <a:lstStyle>
             <a:lvl1pPr>
-              <a:defRPr sz="2400"/>
+              <a:defRPr sz="2481"/>
             </a:lvl1pPr>
             <a:lvl2pPr>
-              <a:defRPr sz="2000"/>
+              <a:defRPr sz="2067"/>
             </a:lvl2pPr>
             <a:lvl3pPr>
-              <a:defRPr sz="1800"/>
+              <a:defRPr sz="1860"/>
             </a:lvl3pPr>
             <a:lvl4pPr>
-              <a:defRPr sz="1600"/>
+              <a:defRPr sz="1654"/>
             </a:lvl4pPr>
             <a:lvl5pPr>
-              <a:defRPr sz="1600"/>
+              <a:defRPr sz="1654"/>
             </a:lvl5pPr>
             <a:lvl6pPr>
-              <a:defRPr sz="1600"/>
+              <a:defRPr sz="1654"/>
             </a:lvl6pPr>
             <a:lvl7pPr>
-              <a:defRPr sz="1600"/>
+              <a:defRPr sz="1654"/>
             </a:lvl7pPr>
             <a:lvl8pPr>
-              <a:defRPr sz="1600"/>
+              <a:defRPr sz="1654"/>
             </a:lvl8pPr>
             <a:lvl9pPr>
-              <a:defRPr sz="1600"/>
+              <a:defRPr sz="1654"/>
             </a:lvl9pPr>
           </a:lstStyle>
           <a:p>
@@ -1611,8 +1611,8 @@
         </p:nvSpPr>
         <p:spPr>
           <a:xfrm>
-            <a:off x="4645025" y="1535113"/>
-            <a:ext cx="4041775" cy="639762"/>
+            <a:off x="4319632" y="634660"/>
+            <a:ext cx="3758641" cy="264494"/>
           </a:xfrm>
         </p:spPr>
         <p:txBody>
@@ -1620,39 +1620,39 @@
           <a:lstStyle>
             <a:lvl1pPr marL="0" indent="0">
               <a:buNone/>
-              <a:defRPr sz="2400" b="1"/>
+              <a:defRPr sz="2481" b="1"/>
             </a:lvl1pPr>
-            <a:lvl2pPr marL="457200" indent="0">
-              <a:buNone/>
-              <a:defRPr sz="2000" b="1"/>
+            <a:lvl2pPr marL="472557" indent="0">
+              <a:buNone/>
+              <a:defRPr sz="2067" b="1"/>
             </a:lvl2pPr>
-            <a:lvl3pPr marL="914400" indent="0">
-              <a:buNone/>
-              <a:defRPr sz="1800" b="1"/>
+            <a:lvl3pPr marL="945115" indent="0">
+              <a:buNone/>
+              <a:defRPr sz="1860" b="1"/>
             </a:lvl3pPr>
-            <a:lvl4pPr marL="1371600" indent="0">
-              <a:buNone/>
-              <a:defRPr sz="1600" b="1"/>
+            <a:lvl4pPr marL="1417671" indent="0">
+              <a:buNone/>
+              <a:defRPr sz="1654" b="1"/>
             </a:lvl4pPr>
-            <a:lvl5pPr marL="1828800" indent="0">
-              <a:buNone/>
-              <a:defRPr sz="1600" b="1"/>
+            <a:lvl5pPr marL="1890229" indent="0">
+              <a:buNone/>
+              <a:defRPr sz="1654" b="1"/>
             </a:lvl5pPr>
-            <a:lvl6pPr marL="2286000" indent="0">
-              <a:buNone/>
-              <a:defRPr sz="1600" b="1"/>
+            <a:lvl6pPr marL="2362786" indent="0">
+              <a:buNone/>
+              <a:defRPr sz="1654" b="1"/>
             </a:lvl6pPr>
-            <a:lvl7pPr marL="2743200" indent="0">
-              <a:buNone/>
-              <a:defRPr sz="1600" b="1"/>
+            <a:lvl7pPr marL="2835344" indent="0">
+              <a:buNone/>
+              <a:defRPr sz="1654" b="1"/>
             </a:lvl7pPr>
-            <a:lvl8pPr marL="3200400" indent="0">
-              <a:buNone/>
-              <a:defRPr sz="1600" b="1"/>
+            <a:lvl8pPr marL="3307900" indent="0">
+              <a:buNone/>
+              <a:defRPr sz="1654" b="1"/>
             </a:lvl8pPr>
-            <a:lvl9pPr marL="3657600" indent="0">
-              <a:buNone/>
-              <a:defRPr sz="1600" b="1"/>
+            <a:lvl9pPr marL="3780457" indent="0">
+              <a:buNone/>
+              <a:defRPr sz="1654" b="1"/>
             </a:lvl9pPr>
           </a:lstStyle>
           <a:p>
@@ -1676,39 +1676,39 @@
         </p:nvSpPr>
         <p:spPr>
           <a:xfrm>
-            <a:off x="4645025" y="2174875"/>
-            <a:ext cx="4041775" cy="3951288"/>
+            <a:off x="4319632" y="899151"/>
+            <a:ext cx="3758641" cy="1633566"/>
           </a:xfrm>
         </p:spPr>
         <p:txBody>
           <a:bodyPr/>
           <a:lstStyle>
             <a:lvl1pPr>
-              <a:defRPr sz="2400"/>
+              <a:defRPr sz="2481"/>
             </a:lvl1pPr>
             <a:lvl2pPr>
-              <a:defRPr sz="2000"/>
+              <a:defRPr sz="2067"/>
             </a:lvl2pPr>
             <a:lvl3pPr>
-              <a:defRPr sz="1800"/>
+              <a:defRPr sz="1860"/>
             </a:lvl3pPr>
             <a:lvl4pPr>
-              <a:defRPr sz="1600"/>
+              <a:defRPr sz="1654"/>
             </a:lvl4pPr>
             <a:lvl5pPr>
-              <a:defRPr sz="1600"/>
+              <a:defRPr sz="1654"/>
             </a:lvl5pPr>
             <a:lvl6pPr>
-              <a:defRPr sz="1600"/>
+              <a:defRPr sz="1654"/>
             </a:lvl6pPr>
             <a:lvl7pPr>
-              <a:defRPr sz="1600"/>
+              <a:defRPr sz="1654"/>
             </a:lvl7pPr>
             <a:lvl8pPr>
-              <a:defRPr sz="1600"/>
+              <a:defRPr sz="1654"/>
             </a:lvl8pPr>
             <a:lvl9pPr>
-              <a:defRPr sz="1600"/>
+              <a:defRPr sz="1654"/>
             </a:lvl9pPr>
           </a:lstStyle>
           <a:p>
@@ -2067,15 +2067,15 @@
         </p:nvSpPr>
         <p:spPr>
           <a:xfrm>
-            <a:off x="457200" y="273050"/>
-            <a:ext cx="3008313" cy="1162050"/>
+            <a:off x="425181" y="112886"/>
+            <a:ext cx="2797574" cy="480422"/>
           </a:xfrm>
         </p:spPr>
         <p:txBody>
           <a:bodyPr anchor="b"/>
           <a:lstStyle>
             <a:lvl1pPr algn="l">
-              <a:defRPr sz="2000" b="1"/>
+              <a:defRPr sz="2067" b="1"/>
             </a:lvl1pPr>
           </a:lstStyle>
           <a:p>
@@ -2098,39 +2098,39 @@
         </p:nvSpPr>
         <p:spPr>
           <a:xfrm>
-            <a:off x="3575050" y="273050"/>
-            <a:ext cx="5111750" cy="5853113"/>
+            <a:off x="3324614" y="112890"/>
+            <a:ext cx="4753662" cy="2419828"/>
           </a:xfrm>
         </p:spPr>
         <p:txBody>
           <a:bodyPr/>
           <a:lstStyle>
             <a:lvl1pPr>
-              <a:defRPr sz="3200"/>
+              <a:defRPr sz="3308"/>
             </a:lvl1pPr>
             <a:lvl2pPr>
-              <a:defRPr sz="2800"/>
+              <a:defRPr sz="2894"/>
             </a:lvl2pPr>
             <a:lvl3pPr>
-              <a:defRPr sz="2400"/>
+              <a:defRPr sz="2481"/>
             </a:lvl3pPr>
             <a:lvl4pPr>
-              <a:defRPr sz="2000"/>
+              <a:defRPr sz="2067"/>
             </a:lvl4pPr>
             <a:lvl5pPr>
-              <a:defRPr sz="2000"/>
+              <a:defRPr sz="2067"/>
             </a:lvl5pPr>
             <a:lvl6pPr>
-              <a:defRPr sz="2000"/>
+              <a:defRPr sz="2067"/>
             </a:lvl6pPr>
             <a:lvl7pPr>
-              <a:defRPr sz="2000"/>
+              <a:defRPr sz="2067"/>
             </a:lvl7pPr>
             <a:lvl8pPr>
-              <a:defRPr sz="2000"/>
+              <a:defRPr sz="2067"/>
             </a:lvl8pPr>
             <a:lvl9pPr>
-              <a:defRPr sz="2000"/>
+              <a:defRPr sz="2067"/>
             </a:lvl9pPr>
           </a:lstStyle>
           <a:p>
@@ -2182,8 +2182,8 @@
         </p:nvSpPr>
         <p:spPr>
           <a:xfrm>
-            <a:off x="457200" y="1435100"/>
-            <a:ext cx="3008313" cy="4691063"/>
+            <a:off x="425181" y="593311"/>
+            <a:ext cx="2797574" cy="1939407"/>
           </a:xfrm>
         </p:spPr>
         <p:txBody>
@@ -2191,39 +2191,39 @@
           <a:lstStyle>
             <a:lvl1pPr marL="0" indent="0">
               <a:buNone/>
-              <a:defRPr sz="1400"/>
+              <a:defRPr sz="1447"/>
             </a:lvl1pPr>
-            <a:lvl2pPr marL="457200" indent="0">
-              <a:buNone/>
-              <a:defRPr sz="1200"/>
+            <a:lvl2pPr marL="472557" indent="0">
+              <a:buNone/>
+              <a:defRPr sz="1240"/>
             </a:lvl2pPr>
-            <a:lvl3pPr marL="914400" indent="0">
-              <a:buNone/>
-              <a:defRPr sz="1000"/>
+            <a:lvl3pPr marL="945115" indent="0">
+              <a:buNone/>
+              <a:defRPr sz="1034"/>
             </a:lvl3pPr>
-            <a:lvl4pPr marL="1371600" indent="0">
-              <a:buNone/>
-              <a:defRPr sz="900"/>
+            <a:lvl4pPr marL="1417671" indent="0">
+              <a:buNone/>
+              <a:defRPr sz="930"/>
             </a:lvl4pPr>
-            <a:lvl5pPr marL="1828800" indent="0">
-              <a:buNone/>
-              <a:defRPr sz="900"/>
+            <a:lvl5pPr marL="1890229" indent="0">
+              <a:buNone/>
+              <a:defRPr sz="930"/>
             </a:lvl5pPr>
-            <a:lvl6pPr marL="2286000" indent="0">
-              <a:buNone/>
-              <a:defRPr sz="900"/>
+            <a:lvl6pPr marL="2362786" indent="0">
+              <a:buNone/>
+              <a:defRPr sz="930"/>
             </a:lvl6pPr>
-            <a:lvl7pPr marL="2743200" indent="0">
-              <a:buNone/>
-              <a:defRPr sz="900"/>
+            <a:lvl7pPr marL="2835344" indent="0">
+              <a:buNone/>
+              <a:defRPr sz="930"/>
             </a:lvl7pPr>
-            <a:lvl8pPr marL="3200400" indent="0">
-              <a:buNone/>
-              <a:defRPr sz="900"/>
+            <a:lvl8pPr marL="3307900" indent="0">
+              <a:buNone/>
+              <a:defRPr sz="930"/>
             </a:lvl8pPr>
-            <a:lvl9pPr marL="3657600" indent="0">
-              <a:buNone/>
-              <a:defRPr sz="900"/>
+            <a:lvl9pPr marL="3780457" indent="0">
+              <a:buNone/>
+              <a:defRPr sz="930"/>
             </a:lvl9pPr>
           </a:lstStyle>
           <a:p>
@@ -2342,15 +2342,15 @@
         </p:nvSpPr>
         <p:spPr>
           <a:xfrm>
-            <a:off x="1792288" y="4800600"/>
-            <a:ext cx="5486400" cy="566738"/>
+            <a:off x="1666738" y="1984695"/>
+            <a:ext cx="5102066" cy="234304"/>
           </a:xfrm>
         </p:spPr>
         <p:txBody>
           <a:bodyPr anchor="b"/>
           <a:lstStyle>
             <a:lvl1pPr algn="l">
-              <a:defRPr sz="2000" b="1"/>
+              <a:defRPr sz="2067" b="1"/>
             </a:lvl1pPr>
           </a:lstStyle>
           <a:p>
@@ -2373,8 +2373,8 @@
         </p:nvSpPr>
         <p:spPr>
           <a:xfrm>
-            <a:off x="1792288" y="612775"/>
-            <a:ext cx="5486400" cy="4114800"/>
+            <a:off x="1666738" y="253337"/>
+            <a:ext cx="5102066" cy="1701165"/>
           </a:xfrm>
         </p:spPr>
         <p:txBody>
@@ -2382,39 +2382,39 @@
           <a:lstStyle>
             <a:lvl1pPr marL="0" indent="0">
               <a:buNone/>
-              <a:defRPr sz="3200"/>
+              <a:defRPr sz="3308"/>
             </a:lvl1pPr>
-            <a:lvl2pPr marL="457200" indent="0">
-              <a:buNone/>
-              <a:defRPr sz="2800"/>
+            <a:lvl2pPr marL="472557" indent="0">
+              <a:buNone/>
+              <a:defRPr sz="2894"/>
             </a:lvl2pPr>
-            <a:lvl3pPr marL="914400" indent="0">
-              <a:buNone/>
-              <a:defRPr sz="2400"/>
+            <a:lvl3pPr marL="945115" indent="0">
+              <a:buNone/>
+              <a:defRPr sz="2481"/>
             </a:lvl3pPr>
-            <a:lvl4pPr marL="1371600" indent="0">
-              <a:buNone/>
-              <a:defRPr sz="2000"/>
+            <a:lvl4pPr marL="1417671" indent="0">
+              <a:buNone/>
+              <a:defRPr sz="2067"/>
             </a:lvl4pPr>
-            <a:lvl5pPr marL="1828800" indent="0">
-              <a:buNone/>
-              <a:defRPr sz="2000"/>
+            <a:lvl5pPr marL="1890229" indent="0">
+              <a:buNone/>
+              <a:defRPr sz="2067"/>
             </a:lvl5pPr>
-            <a:lvl6pPr marL="2286000" indent="0">
-              <a:buNone/>
-              <a:defRPr sz="2000"/>
+            <a:lvl6pPr marL="2362786" indent="0">
+              <a:buNone/>
+              <a:defRPr sz="2067"/>
             </a:lvl6pPr>
-            <a:lvl7pPr marL="2743200" indent="0">
-              <a:buNone/>
-              <a:defRPr sz="2000"/>
+            <a:lvl7pPr marL="2835344" indent="0">
+              <a:buNone/>
+              <a:defRPr sz="2067"/>
             </a:lvl7pPr>
-            <a:lvl8pPr marL="3200400" indent="0">
-              <a:buNone/>
-              <a:defRPr sz="2000"/>
+            <a:lvl8pPr marL="3307900" indent="0">
+              <a:buNone/>
+              <a:defRPr sz="2067"/>
             </a:lvl8pPr>
-            <a:lvl9pPr marL="3657600" indent="0">
-              <a:buNone/>
-              <a:defRPr sz="2000"/>
+            <a:lvl9pPr marL="3780457" indent="0">
+              <a:buNone/>
+              <a:defRPr sz="2067"/>
             </a:lvl9pPr>
           </a:lstStyle>
           <a:p>
@@ -2434,8 +2434,8 @@
         </p:nvSpPr>
         <p:spPr>
           <a:xfrm>
-            <a:off x="1792288" y="5367338"/>
-            <a:ext cx="5486400" cy="804862"/>
+            <a:off x="1666738" y="2218999"/>
+            <a:ext cx="5102066" cy="332751"/>
           </a:xfrm>
         </p:spPr>
         <p:txBody>
@@ -2443,39 +2443,39 @@
           <a:lstStyle>
             <a:lvl1pPr marL="0" indent="0">
               <a:buNone/>
-              <a:defRPr sz="1400"/>
+              <a:defRPr sz="1447"/>
             </a:lvl1pPr>
-            <a:lvl2pPr marL="457200" indent="0">
-              <a:buNone/>
-              <a:defRPr sz="1200"/>
+            <a:lvl2pPr marL="472557" indent="0">
+              <a:buNone/>
+              <a:defRPr sz="1240"/>
             </a:lvl2pPr>
-            <a:lvl3pPr marL="914400" indent="0">
-              <a:buNone/>
-              <a:defRPr sz="1000"/>
+            <a:lvl3pPr marL="945115" indent="0">
+              <a:buNone/>
+              <a:defRPr sz="1034"/>
             </a:lvl3pPr>
-            <a:lvl4pPr marL="1371600" indent="0">
-              <a:buNone/>
-              <a:defRPr sz="900"/>
+            <a:lvl4pPr marL="1417671" indent="0">
+              <a:buNone/>
+              <a:defRPr sz="930"/>
             </a:lvl4pPr>
-            <a:lvl5pPr marL="1828800" indent="0">
-              <a:buNone/>
-              <a:defRPr sz="900"/>
+            <a:lvl5pPr marL="1890229" indent="0">
+              <a:buNone/>
+              <a:defRPr sz="930"/>
             </a:lvl5pPr>
-            <a:lvl6pPr marL="2286000" indent="0">
-              <a:buNone/>
-              <a:defRPr sz="900"/>
+            <a:lvl6pPr marL="2362786" indent="0">
+              <a:buNone/>
+              <a:defRPr sz="930"/>
             </a:lvl6pPr>
-            <a:lvl7pPr marL="2743200" indent="0">
-              <a:buNone/>
-              <a:defRPr sz="900"/>
+            <a:lvl7pPr marL="2835344" indent="0">
+              <a:buNone/>
+              <a:defRPr sz="930"/>
             </a:lvl7pPr>
-            <a:lvl8pPr marL="3200400" indent="0">
-              <a:buNone/>
-              <a:defRPr sz="900"/>
+            <a:lvl8pPr marL="3307900" indent="0">
+              <a:buNone/>
+              <a:defRPr sz="930"/>
             </a:lvl8pPr>
-            <a:lvl9pPr marL="3657600" indent="0">
-              <a:buNone/>
-              <a:defRPr sz="900"/>
+            <a:lvl9pPr marL="3780457" indent="0">
+              <a:buNone/>
+              <a:defRPr sz="930"/>
             </a:lvl9pPr>
           </a:lstStyle>
           <a:p>
@@ -2599,8 +2599,8 @@
         </p:nvSpPr>
         <p:spPr>
           <a:xfrm>
-            <a:off x="457200" y="274638"/>
-            <a:ext cx="8229600" cy="1143000"/>
+            <a:off x="425176" y="113543"/>
+            <a:ext cx="7653099" cy="472546"/>
           </a:xfrm>
           <a:prstGeom prst="rect">
             <a:avLst/>
@@ -2631,8 +2631,8 @@
         </p:nvSpPr>
         <p:spPr>
           <a:xfrm>
-            <a:off x="457200" y="1600200"/>
-            <a:ext cx="8229600" cy="4525963"/>
+            <a:off x="425176" y="661569"/>
+            <a:ext cx="7653099" cy="1871150"/>
           </a:xfrm>
           <a:prstGeom prst="rect">
             <a:avLst/>
@@ -2692,8 +2692,8 @@
         </p:nvSpPr>
         <p:spPr>
           <a:xfrm>
-            <a:off x="457200" y="6356350"/>
-            <a:ext cx="2133600" cy="365125"/>
+            <a:off x="425172" y="2627882"/>
+            <a:ext cx="1984137" cy="150952"/>
           </a:xfrm>
           <a:prstGeom prst="rect">
             <a:avLst/>
@@ -2703,7 +2703,7 @@
           <a:bodyPr vert="horz" lIns="91440" tIns="45720" rIns="91440" bIns="45720" rtlCol="0" anchor="ctr"/>
           <a:lstStyle>
             <a:lvl1pPr algn="l">
-              <a:defRPr sz="1200">
+              <a:defRPr sz="1240">
                 <a:solidFill>
                   <a:schemeClr val="tx1">
                     <a:tint val="75000"/>
@@ -2733,8 +2733,8 @@
         </p:nvSpPr>
         <p:spPr>
           <a:xfrm>
-            <a:off x="3124200" y="6356350"/>
-            <a:ext cx="2895600" cy="365125"/>
+            <a:off x="2905344" y="2627882"/>
+            <a:ext cx="2692757" cy="150952"/>
           </a:xfrm>
           <a:prstGeom prst="rect">
             <a:avLst/>
@@ -2744,7 +2744,7 @@
           <a:bodyPr vert="horz" lIns="91440" tIns="45720" rIns="91440" bIns="45720" rtlCol="0" anchor="ctr"/>
           <a:lstStyle>
             <a:lvl1pPr algn="ctr">
-              <a:defRPr sz="1200">
+              <a:defRPr sz="1240">
                 <a:solidFill>
                   <a:schemeClr val="tx1">
                     <a:tint val="75000"/>
@@ -2770,8 +2770,8 @@
         </p:nvSpPr>
         <p:spPr>
           <a:xfrm>
-            <a:off x="6553200" y="6356350"/>
-            <a:ext cx="2133600" cy="365125"/>
+            <a:off x="6094135" y="2627882"/>
+            <a:ext cx="1984137" cy="150952"/>
           </a:xfrm>
           <a:prstGeom prst="rect">
             <a:avLst/>
@@ -2781,7 +2781,7 @@
           <a:bodyPr vert="horz" lIns="91440" tIns="45720" rIns="91440" bIns="45720" rtlCol="0" anchor="ctr"/>
           <a:lstStyle>
             <a:lvl1pPr algn="r">
-              <a:defRPr sz="1200">
+              <a:defRPr sz="1240">
                 <a:solidFill>
                   <a:schemeClr val="tx1">
                     <a:tint val="75000"/>
@@ -2822,12 +2822,12 @@
   </p:sldLayoutIdLst>
   <p:txStyles>
     <p:titleStyle>
-      <a:lvl1pPr algn="ctr" defTabSz="457200" rtl="0" eaLnBrk="1" latinLnBrk="0" hangingPunct="1">
+      <a:lvl1pPr algn="ctr" defTabSz="472557" rtl="0" eaLnBrk="1" latinLnBrk="0" hangingPunct="1">
         <a:spcBef>
           <a:spcPct val="0"/>
         </a:spcBef>
         <a:buNone/>
-        <a:defRPr sz="4400" kern="1200">
+        <a:defRPr sz="4548" kern="1200">
           <a:solidFill>
             <a:schemeClr val="tx1"/>
           </a:solidFill>
@@ -2838,13 +2838,13 @@
       </a:lvl1pPr>
     </p:titleStyle>
     <p:bodyStyle>
-      <a:lvl1pPr marL="342900" indent="-342900" algn="l" defTabSz="457200" rtl="0" eaLnBrk="1" latinLnBrk="0" hangingPunct="1">
+      <a:lvl1pPr marL="354418" indent="-354418" algn="l" defTabSz="472557" rtl="0" eaLnBrk="1" latinLnBrk="0" hangingPunct="1">
         <a:spcBef>
           <a:spcPct val="20000"/>
         </a:spcBef>
         <a:buFont typeface="Arial"/>
         <a:buChar char="•"/>
-        <a:defRPr sz="3200" kern="1200">
+        <a:defRPr sz="3308" kern="1200">
           <a:solidFill>
             <a:schemeClr val="tx1"/>
           </a:solidFill>
@@ -2853,13 +2853,13 @@
           <a:cs typeface="+mn-cs"/>
         </a:defRPr>
       </a:lvl1pPr>
-      <a:lvl2pPr marL="742950" indent="-285750" algn="l" defTabSz="457200" rtl="0" eaLnBrk="1" latinLnBrk="0" hangingPunct="1">
+      <a:lvl2pPr marL="767907" indent="-295349" algn="l" defTabSz="472557" rtl="0" eaLnBrk="1" latinLnBrk="0" hangingPunct="1">
         <a:spcBef>
           <a:spcPct val="20000"/>
         </a:spcBef>
         <a:buFont typeface="Arial"/>
         <a:buChar char="–"/>
-        <a:defRPr sz="2800" kern="1200">
+        <a:defRPr sz="2894" kern="1200">
           <a:solidFill>
             <a:schemeClr val="tx1"/>
           </a:solidFill>
@@ -2868,13 +2868,13 @@
           <a:cs typeface="+mn-cs"/>
         </a:defRPr>
       </a:lvl2pPr>
-      <a:lvl3pPr marL="1143000" indent="-228600" algn="l" defTabSz="457200" rtl="0" eaLnBrk="1" latinLnBrk="0" hangingPunct="1">
+      <a:lvl3pPr marL="1181393" indent="-236279" algn="l" defTabSz="472557" rtl="0" eaLnBrk="1" latinLnBrk="0" hangingPunct="1">
         <a:spcBef>
           <a:spcPct val="20000"/>
         </a:spcBef>
         <a:buFont typeface="Arial"/>
         <a:buChar char="•"/>
-        <a:defRPr sz="2400" kern="1200">
+        <a:defRPr sz="2481" kern="1200">
           <a:solidFill>
             <a:schemeClr val="tx1"/>
           </a:solidFill>
@@ -2883,13 +2883,13 @@
           <a:cs typeface="+mn-cs"/>
         </a:defRPr>
       </a:lvl3pPr>
-      <a:lvl4pPr marL="1600200" indent="-228600" algn="l" defTabSz="457200" rtl="0" eaLnBrk="1" latinLnBrk="0" hangingPunct="1">
+      <a:lvl4pPr marL="1653950" indent="-236279" algn="l" defTabSz="472557" rtl="0" eaLnBrk="1" latinLnBrk="0" hangingPunct="1">
         <a:spcBef>
           <a:spcPct val="20000"/>
         </a:spcBef>
         <a:buFont typeface="Arial"/>
         <a:buChar char="–"/>
-        <a:defRPr sz="2000" kern="1200">
+        <a:defRPr sz="2067" kern="1200">
           <a:solidFill>
             <a:schemeClr val="tx1"/>
           </a:solidFill>
@@ -2898,13 +2898,13 @@
           <a:cs typeface="+mn-cs"/>
         </a:defRPr>
       </a:lvl4pPr>
-      <a:lvl5pPr marL="2057400" indent="-228600" algn="l" defTabSz="457200" rtl="0" eaLnBrk="1" latinLnBrk="0" hangingPunct="1">
+      <a:lvl5pPr marL="2126507" indent="-236279" algn="l" defTabSz="472557" rtl="0" eaLnBrk="1" latinLnBrk="0" hangingPunct="1">
         <a:spcBef>
           <a:spcPct val="20000"/>
         </a:spcBef>
         <a:buFont typeface="Arial"/>
         <a:buChar char="»"/>
-        <a:defRPr sz="2000" kern="1200">
+        <a:defRPr sz="2067" kern="1200">
           <a:solidFill>
             <a:schemeClr val="tx1"/>
           </a:solidFill>
@@ -2913,13 +2913,13 @@
           <a:cs typeface="+mn-cs"/>
         </a:defRPr>
       </a:lvl5pPr>
-      <a:lvl6pPr marL="2514600" indent="-228600" algn="l" defTabSz="457200" rtl="0" eaLnBrk="1" latinLnBrk="0" hangingPunct="1">
+      <a:lvl6pPr marL="2599065" indent="-236279" algn="l" defTabSz="472557" rtl="0" eaLnBrk="1" latinLnBrk="0" hangingPunct="1">
         <a:spcBef>
           <a:spcPct val="20000"/>
         </a:spcBef>
         <a:buFont typeface="Arial"/>
         <a:buChar char="•"/>
-        <a:defRPr sz="2000" kern="1200">
+        <a:defRPr sz="2067" kern="1200">
           <a:solidFill>
             <a:schemeClr val="tx1"/>
           </a:solidFill>
@@ -2928,13 +2928,13 @@
           <a:cs typeface="+mn-cs"/>
         </a:defRPr>
       </a:lvl6pPr>
-      <a:lvl7pPr marL="2971800" indent="-228600" algn="l" defTabSz="457200" rtl="0" eaLnBrk="1" latinLnBrk="0" hangingPunct="1">
+      <a:lvl7pPr marL="3071621" indent="-236279" algn="l" defTabSz="472557" rtl="0" eaLnBrk="1" latinLnBrk="0" hangingPunct="1">
         <a:spcBef>
           <a:spcPct val="20000"/>
         </a:spcBef>
         <a:buFont typeface="Arial"/>
         <a:buChar char="•"/>
-        <a:defRPr sz="2000" kern="1200">
+        <a:defRPr sz="2067" kern="1200">
           <a:solidFill>
             <a:schemeClr val="tx1"/>
           </a:solidFill>
@@ -2943,13 +2943,13 @@
           <a:cs typeface="+mn-cs"/>
         </a:defRPr>
       </a:lvl7pPr>
-      <a:lvl8pPr marL="3429000" indent="-228600" algn="l" defTabSz="457200" rtl="0" eaLnBrk="1" latinLnBrk="0" hangingPunct="1">
+      <a:lvl8pPr marL="3544179" indent="-236279" algn="l" defTabSz="472557" rtl="0" eaLnBrk="1" latinLnBrk="0" hangingPunct="1">
         <a:spcBef>
           <a:spcPct val="20000"/>
         </a:spcBef>
         <a:buFont typeface="Arial"/>
         <a:buChar char="•"/>
-        <a:defRPr sz="2000" kern="1200">
+        <a:defRPr sz="2067" kern="1200">
           <a:solidFill>
             <a:schemeClr val="tx1"/>
           </a:solidFill>
@@ -2958,13 +2958,13 @@
           <a:cs typeface="+mn-cs"/>
         </a:defRPr>
       </a:lvl8pPr>
-      <a:lvl9pPr marL="3886200" indent="-228600" algn="l" defTabSz="457200" rtl="0" eaLnBrk="1" latinLnBrk="0" hangingPunct="1">
+      <a:lvl9pPr marL="4016736" indent="-236279" algn="l" defTabSz="472557" rtl="0" eaLnBrk="1" latinLnBrk="0" hangingPunct="1">
         <a:spcBef>
           <a:spcPct val="20000"/>
         </a:spcBef>
         <a:buFont typeface="Arial"/>
         <a:buChar char="•"/>
-        <a:defRPr sz="2000" kern="1200">
+        <a:defRPr sz="2067" kern="1200">
           <a:solidFill>
             <a:schemeClr val="tx1"/>
           </a:solidFill>
@@ -2978,8 +2978,8 @@
       <a:defPPr>
         <a:defRPr lang="en-US"/>
       </a:defPPr>
-      <a:lvl1pPr marL="0" algn="l" defTabSz="457200" rtl="0" eaLnBrk="1" latinLnBrk="0" hangingPunct="1">
-        <a:defRPr sz="1800" kern="1200">
+      <a:lvl1pPr marL="0" algn="l" defTabSz="472557" rtl="0" eaLnBrk="1" latinLnBrk="0" hangingPunct="1">
+        <a:defRPr sz="1860" kern="1200">
           <a:solidFill>
             <a:schemeClr val="tx1"/>
           </a:solidFill>
@@ -2988,8 +2988,8 @@
           <a:cs typeface="+mn-cs"/>
         </a:defRPr>
       </a:lvl1pPr>
-      <a:lvl2pPr marL="457200" algn="l" defTabSz="457200" rtl="0" eaLnBrk="1" latinLnBrk="0" hangingPunct="1">
-        <a:defRPr sz="1800" kern="1200">
+      <a:lvl2pPr marL="472557" algn="l" defTabSz="472557" rtl="0" eaLnBrk="1" latinLnBrk="0" hangingPunct="1">
+        <a:defRPr sz="1860" kern="1200">
           <a:solidFill>
             <a:schemeClr val="tx1"/>
           </a:solidFill>
@@ -2998,8 +2998,8 @@
           <a:cs typeface="+mn-cs"/>
         </a:defRPr>
       </a:lvl2pPr>
-      <a:lvl3pPr marL="914400" algn="l" defTabSz="457200" rtl="0" eaLnBrk="1" latinLnBrk="0" hangingPunct="1">
-        <a:defRPr sz="1800" kern="1200">
+      <a:lvl3pPr marL="945115" algn="l" defTabSz="472557" rtl="0" eaLnBrk="1" latinLnBrk="0" hangingPunct="1">
+        <a:defRPr sz="1860" kern="1200">
           <a:solidFill>
             <a:schemeClr val="tx1"/>
           </a:solidFill>
@@ -3008,8 +3008,8 @@
           <a:cs typeface="+mn-cs"/>
         </a:defRPr>
       </a:lvl3pPr>
-      <a:lvl4pPr marL="1371600" algn="l" defTabSz="457200" rtl="0" eaLnBrk="1" latinLnBrk="0" hangingPunct="1">
-        <a:defRPr sz="1800" kern="1200">
+      <a:lvl4pPr marL="1417671" algn="l" defTabSz="472557" rtl="0" eaLnBrk="1" latinLnBrk="0" hangingPunct="1">
+        <a:defRPr sz="1860" kern="1200">
           <a:solidFill>
             <a:schemeClr val="tx1"/>
           </a:solidFill>
@@ -3018,8 +3018,8 @@
           <a:cs typeface="+mn-cs"/>
         </a:defRPr>
       </a:lvl4pPr>
-      <a:lvl5pPr marL="1828800" algn="l" defTabSz="457200" rtl="0" eaLnBrk="1" latinLnBrk="0" hangingPunct="1">
-        <a:defRPr sz="1800" kern="1200">
+      <a:lvl5pPr marL="1890229" algn="l" defTabSz="472557" rtl="0" eaLnBrk="1" latinLnBrk="0" hangingPunct="1">
+        <a:defRPr sz="1860" kern="1200">
           <a:solidFill>
             <a:schemeClr val="tx1"/>
           </a:solidFill>
@@ -3028,8 +3028,8 @@
           <a:cs typeface="+mn-cs"/>
         </a:defRPr>
       </a:lvl5pPr>
-      <a:lvl6pPr marL="2286000" algn="l" defTabSz="457200" rtl="0" eaLnBrk="1" latinLnBrk="0" hangingPunct="1">
-        <a:defRPr sz="1800" kern="1200">
+      <a:lvl6pPr marL="2362786" algn="l" defTabSz="472557" rtl="0" eaLnBrk="1" latinLnBrk="0" hangingPunct="1">
+        <a:defRPr sz="1860" kern="1200">
           <a:solidFill>
             <a:schemeClr val="tx1"/>
           </a:solidFill>
@@ -3038,8 +3038,8 @@
           <a:cs typeface="+mn-cs"/>
         </a:defRPr>
       </a:lvl6pPr>
-      <a:lvl7pPr marL="2743200" algn="l" defTabSz="457200" rtl="0" eaLnBrk="1" latinLnBrk="0" hangingPunct="1">
-        <a:defRPr sz="1800" kern="1200">
+      <a:lvl7pPr marL="2835344" algn="l" defTabSz="472557" rtl="0" eaLnBrk="1" latinLnBrk="0" hangingPunct="1">
+        <a:defRPr sz="1860" kern="1200">
           <a:solidFill>
             <a:schemeClr val="tx1"/>
           </a:solidFill>
@@ -3048,8 +3048,8 @@
           <a:cs typeface="+mn-cs"/>
         </a:defRPr>
       </a:lvl7pPr>
-      <a:lvl8pPr marL="3200400" algn="l" defTabSz="457200" rtl="0" eaLnBrk="1" latinLnBrk="0" hangingPunct="1">
-        <a:defRPr sz="1800" kern="1200">
+      <a:lvl8pPr marL="3307900" algn="l" defTabSz="472557" rtl="0" eaLnBrk="1" latinLnBrk="0" hangingPunct="1">
+        <a:defRPr sz="1860" kern="1200">
           <a:solidFill>
             <a:schemeClr val="tx1"/>
           </a:solidFill>
@@ -3058,8 +3058,8 @@
           <a:cs typeface="+mn-cs"/>
         </a:defRPr>
       </a:lvl8pPr>
-      <a:lvl9pPr marL="3657600" algn="l" defTabSz="457200" rtl="0" eaLnBrk="1" latinLnBrk="0" hangingPunct="1">
-        <a:defRPr sz="1800" kern="1200">
+      <a:lvl9pPr marL="3780457" algn="l" defTabSz="472557" rtl="0" eaLnBrk="1" latinLnBrk="0" hangingPunct="1">
+        <a:defRPr sz="1860" kern="1200">
           <a:solidFill>
             <a:schemeClr val="tx1"/>
           </a:solidFill>
@@ -3100,14 +3100,20 @@
       </p:grpSpPr>
       <p:sp>
         <p:nvSpPr>
-          <p:cNvPr id="2" name="Rounded Rectangle 1"/>
+          <p:cNvPr id="86" name="Rounded Rectangle 85">
+            <a:extLst>
+              <a:ext uri="{FF2B5EF4-FFF2-40B4-BE49-F238E27FC236}">
+                <a16:creationId xmlns:a16="http://schemas.microsoft.com/office/drawing/2014/main" id="{B76A188D-36CE-0287-AC66-BF72F104503D}"/>
+              </a:ext>
+            </a:extLst>
+          </p:cNvPr>
           <p:cNvSpPr/>
           <p:nvPr/>
         </p:nvSpPr>
         <p:spPr>
           <a:xfrm>
-            <a:off x="384048" y="960120"/>
-            <a:ext cx="3429000" cy="2240280"/>
+            <a:off x="25386" y="48982"/>
+            <a:ext cx="3429000" cy="1451611"/>
           </a:xfrm>
           <a:prstGeom prst="roundRect">
             <a:avLst/>
@@ -3146,14 +3152,20 @@
       </p:sp>
       <p:sp>
         <p:nvSpPr>
-          <p:cNvPr id="3" name="TextBox 2"/>
+          <p:cNvPr id="87" name="TextBox 86">
+            <a:extLst>
+              <a:ext uri="{FF2B5EF4-FFF2-40B4-BE49-F238E27FC236}">
+                <a16:creationId xmlns:a16="http://schemas.microsoft.com/office/drawing/2014/main" id="{77C89C90-6484-4D84-322C-2F4104AA0082}"/>
+              </a:ext>
+            </a:extLst>
+          </p:cNvPr>
           <p:cNvSpPr txBox="1"/>
           <p:nvPr/>
         </p:nvSpPr>
         <p:spPr>
           <a:xfrm>
-            <a:off x="493776" y="1033272"/>
-            <a:ext cx="3209544" cy="594360"/>
+            <a:off x="135115" y="76412"/>
+            <a:ext cx="3319273" cy="594360"/>
           </a:xfrm>
           <a:prstGeom prst="rect">
             <a:avLst/>
@@ -3168,39 +3180,48 @@
           <a:p>
             <a:pPr algn="ctr"/>
             <a:r>
-              <a:rPr sz="2200" b="1">
+              <a:rPr sz="1500" b="1" dirty="0">
                 <a:solidFill>
                   <a:srgbClr val="000000"/>
                 </a:solidFill>
                 <a:latin typeface="Times New Roman"/>
               </a:rPr>
-              <a:t>Thrust 1:  Configurable</a:t>
-            </a:r>
-          </a:p>
-          <a:p>
-            <a:pPr algn="ctr"/>
-            <a:r>
-              <a:rPr sz="2200" b="1">
+              <a:t>Thrust 1:  </a:t>
+            </a:r>
+            <a:r>
+              <a:rPr lang="en-US" sz="1500" b="1" dirty="0">
                 <a:solidFill>
                   <a:srgbClr val="000000"/>
                 </a:solidFill>
                 <a:latin typeface="Times New Roman"/>
               </a:rPr>
-              <a:t>Trust Substrates</a:t>
-            </a:r>
-          </a:p>
-        </p:txBody>
-      </p:sp>
-      <p:sp>
-        <p:nvSpPr>
-          <p:cNvPr id="4" name="TextBox 3"/>
+              <a:t>Application-specific Trusted Execution Domains</a:t>
+            </a:r>
+            <a:endParaRPr sz="1500" b="1" dirty="0">
+              <a:solidFill>
+                <a:srgbClr val="000000"/>
+              </a:solidFill>
+              <a:latin typeface="Times New Roman"/>
+            </a:endParaRPr>
+          </a:p>
+        </p:txBody>
+      </p:sp>
+      <p:sp>
+        <p:nvSpPr>
+          <p:cNvPr id="88" name="TextBox 87">
+            <a:extLst>
+              <a:ext uri="{FF2B5EF4-FFF2-40B4-BE49-F238E27FC236}">
+                <a16:creationId xmlns:a16="http://schemas.microsoft.com/office/drawing/2014/main" id="{6EBE63AA-C736-F01C-800D-70FAC02836E5}"/>
+              </a:ext>
+            </a:extLst>
+          </p:cNvPr>
           <p:cNvSpPr txBox="1"/>
           <p:nvPr/>
         </p:nvSpPr>
         <p:spPr>
           <a:xfrm>
-            <a:off x="548640" y="1947672"/>
-            <a:ext cx="3099816" cy="1097280"/>
+            <a:off x="189980" y="670772"/>
+            <a:ext cx="3099816" cy="715720"/>
           </a:xfrm>
           <a:prstGeom prst="rect">
             <a:avLst/>
@@ -3215,51 +3236,57 @@
           <a:p>
             <a:pPr algn="ctr"/>
             <a:r>
-              <a:rPr sz="1700">
+              <a:rPr lang="en-US" sz="1300" dirty="0">
                 <a:solidFill>
-                  <a:srgbClr val="000000"/>
+                  <a:srgbClr val="222222"/>
                 </a:solidFill>
                 <a:latin typeface="Times New Roman"/>
               </a:rPr>
-              <a:t>Trust descriptors, configurable</a:t>
+              <a:t>Explicit resource composition</a:t>
             </a:r>
           </a:p>
           <a:p>
             <a:pPr algn="ctr"/>
             <a:r>
-              <a:rPr sz="1700">
+              <a:rPr lang="en-US" sz="1300" dirty="0">
                 <a:solidFill>
-                  <a:srgbClr val="000000"/>
+                  <a:srgbClr val="222222"/>
                 </a:solidFill>
                 <a:latin typeface="Times New Roman"/>
               </a:rPr>
-              <a:t>TCB synthesis, hardware/</a:t>
+              <a:t>Hardware-assisted isolation</a:t>
             </a:r>
           </a:p>
           <a:p>
             <a:pPr algn="ctr"/>
             <a:r>
-              <a:rPr sz="1700">
+              <a:rPr lang="en-US" sz="1300" dirty="0">
                 <a:solidFill>
-                  <a:srgbClr val="000000"/>
+                  <a:srgbClr val="222222"/>
                 </a:solidFill>
                 <a:latin typeface="Times New Roman"/>
               </a:rPr>
-              <a:t>software attestation</a:t>
-            </a:r>
-          </a:p>
-        </p:txBody>
-      </p:sp>
-      <p:sp>
-        <p:nvSpPr>
-          <p:cNvPr id="5" name="Rounded Rectangle 4"/>
+              <a:t>Remote attestation of domain configuration</a:t>
+            </a:r>
+          </a:p>
+        </p:txBody>
+      </p:sp>
+      <p:sp>
+        <p:nvSpPr>
+          <p:cNvPr id="89" name="Rounded Rectangle 88">
+            <a:extLst>
+              <a:ext uri="{FF2B5EF4-FFF2-40B4-BE49-F238E27FC236}">
+                <a16:creationId xmlns:a16="http://schemas.microsoft.com/office/drawing/2014/main" id="{E18D6038-D8C1-36F4-4AA2-BAB16A8174E8}"/>
+              </a:ext>
+            </a:extLst>
+          </p:cNvPr>
           <p:cNvSpPr/>
           <p:nvPr/>
         </p:nvSpPr>
         <p:spPr>
           <a:xfrm>
-            <a:off x="4325112" y="960120"/>
-            <a:ext cx="3429000" cy="2240280"/>
+            <a:off x="3966450" y="48982"/>
+            <a:ext cx="3429000" cy="1453896"/>
           </a:xfrm>
           <a:prstGeom prst="roundRect">
             <a:avLst/>
@@ -3298,14 +3325,20 @@
       </p:sp>
       <p:sp>
         <p:nvSpPr>
-          <p:cNvPr id="6" name="TextBox 5"/>
+          <p:cNvPr id="90" name="TextBox 89">
+            <a:extLst>
+              <a:ext uri="{FF2B5EF4-FFF2-40B4-BE49-F238E27FC236}">
+                <a16:creationId xmlns:a16="http://schemas.microsoft.com/office/drawing/2014/main" id="{B342E94D-B401-73A2-3523-9D2D4010075E}"/>
+              </a:ext>
+            </a:extLst>
+          </p:cNvPr>
           <p:cNvSpPr txBox="1"/>
           <p:nvPr/>
         </p:nvSpPr>
         <p:spPr>
           <a:xfrm>
-            <a:off x="4434840" y="1033272"/>
-            <a:ext cx="3209544" cy="594360"/>
+            <a:off x="4076178" y="76414"/>
+            <a:ext cx="3209544" cy="681631"/>
           </a:xfrm>
           <a:prstGeom prst="rect">
             <a:avLst/>
@@ -3320,39 +3353,48 @@
           <a:p>
             <a:pPr algn="ctr"/>
             <a:r>
-              <a:rPr sz="2200" b="1">
+              <a:rPr sz="1500" b="1" dirty="0">
                 <a:solidFill>
                   <a:srgbClr val="000000"/>
                 </a:solidFill>
                 <a:latin typeface="Times New Roman"/>
               </a:rPr>
-              <a:t>Thrust 2:  Compartment-</a:t>
-            </a:r>
-          </a:p>
-          <a:p>
-            <a:pPr algn="ctr"/>
-            <a:r>
-              <a:rPr sz="2200" b="1">
+              <a:t>Thrust 2:  </a:t>
+            </a:r>
+            <a:r>
+              <a:rPr lang="en-US" sz="1500" b="1" dirty="0">
                 <a:solidFill>
                   <a:srgbClr val="000000"/>
                 </a:solidFill>
                 <a:latin typeface="Times New Roman"/>
               </a:rPr>
-              <a:t>Aware Runtime Evidence</a:t>
-            </a:r>
-          </a:p>
-        </p:txBody>
-      </p:sp>
-      <p:sp>
-        <p:nvSpPr>
-          <p:cNvPr id="7" name="TextBox 6"/>
+              <a:t>Scalable Runtime Trust Attestation</a:t>
+            </a:r>
+            <a:endParaRPr sz="1500" b="1" dirty="0">
+              <a:solidFill>
+                <a:srgbClr val="000000"/>
+              </a:solidFill>
+              <a:latin typeface="Times New Roman"/>
+            </a:endParaRPr>
+          </a:p>
+        </p:txBody>
+      </p:sp>
+      <p:sp>
+        <p:nvSpPr>
+          <p:cNvPr id="91" name="TextBox 90">
+            <a:extLst>
+              <a:ext uri="{FF2B5EF4-FFF2-40B4-BE49-F238E27FC236}">
+                <a16:creationId xmlns:a16="http://schemas.microsoft.com/office/drawing/2014/main" id="{D1B00687-8B24-D200-70BD-914DC5DB9333}"/>
+              </a:ext>
+            </a:extLst>
+          </p:cNvPr>
           <p:cNvSpPr txBox="1"/>
           <p:nvPr/>
         </p:nvSpPr>
         <p:spPr>
           <a:xfrm>
-            <a:off x="4489704" y="2297631"/>
-            <a:ext cx="3099816" cy="1097280"/>
+            <a:off x="4131042" y="670772"/>
+            <a:ext cx="3099816" cy="715720"/>
           </a:xfrm>
           <a:prstGeom prst="rect">
             <a:avLst/>
@@ -3367,51 +3409,57 @@
           <a:p>
             <a:pPr algn="ctr"/>
             <a:r>
-              <a:rPr sz="1700" dirty="0">
+              <a:rPr lang="en-US" sz="1300" dirty="0">
                 <a:solidFill>
-                  <a:srgbClr val="000000"/>
+                  <a:srgbClr val="222222"/>
                 </a:solidFill>
                 <a:latin typeface="Times New Roman"/>
               </a:rPr>
-              <a:t>Linear-space runtime evidence,</a:t>
+              <a:t>Control-flow and task evidence</a:t>
             </a:r>
           </a:p>
           <a:p>
             <a:pPr algn="ctr"/>
             <a:r>
-              <a:rPr sz="1700" dirty="0">
+              <a:rPr lang="en-US" sz="1300" dirty="0">
                 <a:solidFill>
-                  <a:srgbClr val="000000"/>
+                  <a:srgbClr val="222222"/>
                 </a:solidFill>
                 <a:latin typeface="Times New Roman"/>
               </a:rPr>
-              <a:t>interrupt-aware verification,</a:t>
+              <a:t>Protected measurement state</a:t>
             </a:r>
           </a:p>
           <a:p>
             <a:pPr algn="ctr"/>
             <a:r>
-              <a:rPr sz="1700" dirty="0">
+              <a:rPr lang="en-US" sz="1300" dirty="0">
                 <a:solidFill>
-                  <a:srgbClr val="000000"/>
+                  <a:srgbClr val="222222"/>
                 </a:solidFill>
                 <a:latin typeface="Times New Roman"/>
               </a:rPr>
-              <a:t>secure measurement generation</a:t>
-            </a:r>
-          </a:p>
-        </p:txBody>
-      </p:sp>
-      <p:sp>
-        <p:nvSpPr>
-          <p:cNvPr id="8" name="Rounded Rectangle 7"/>
+              <a:t>Efficient verifier algorithms</a:t>
+            </a:r>
+          </a:p>
+        </p:txBody>
+      </p:sp>
+      <p:sp>
+        <p:nvSpPr>
+          <p:cNvPr id="92" name="Rounded Rectangle 91">
+            <a:extLst>
+              <a:ext uri="{FF2B5EF4-FFF2-40B4-BE49-F238E27FC236}">
+                <a16:creationId xmlns:a16="http://schemas.microsoft.com/office/drawing/2014/main" id="{A1658AA5-00CC-23F5-58BB-1208F87088E9}"/>
+              </a:ext>
+            </a:extLst>
+          </p:cNvPr>
           <p:cNvSpPr/>
           <p:nvPr/>
         </p:nvSpPr>
         <p:spPr>
           <a:xfrm>
-            <a:off x="8247888" y="960120"/>
-            <a:ext cx="3429000" cy="2240280"/>
+            <a:off x="7889226" y="48982"/>
+            <a:ext cx="3429000" cy="1453896"/>
           </a:xfrm>
           <a:prstGeom prst="roundRect">
             <a:avLst/>
@@ -3450,14 +3498,20 @@
       </p:sp>
       <p:sp>
         <p:nvSpPr>
-          <p:cNvPr id="9" name="TextBox 8"/>
+          <p:cNvPr id="93" name="TextBox 92">
+            <a:extLst>
+              <a:ext uri="{FF2B5EF4-FFF2-40B4-BE49-F238E27FC236}">
+                <a16:creationId xmlns:a16="http://schemas.microsoft.com/office/drawing/2014/main" id="{4D2118F3-02AD-2DED-DD52-C423E135F133}"/>
+              </a:ext>
+            </a:extLst>
+          </p:cNvPr>
           <p:cNvSpPr txBox="1"/>
           <p:nvPr/>
         </p:nvSpPr>
         <p:spPr>
           <a:xfrm>
-            <a:off x="8357616" y="1033272"/>
-            <a:ext cx="3209544" cy="594360"/>
+            <a:off x="7998956" y="122132"/>
+            <a:ext cx="3209544" cy="914400"/>
           </a:xfrm>
           <a:prstGeom prst="rect">
             <a:avLst/>
@@ -3472,50 +3526,47 @@
           <a:p>
             <a:pPr algn="ctr"/>
             <a:r>
-              <a:rPr sz="2000" b="1">
+              <a:rPr sz="1500" b="1" dirty="0">
                 <a:solidFill>
                   <a:srgbClr val="000000"/>
                 </a:solidFill>
                 <a:latin typeface="Times New Roman"/>
               </a:rPr>
-              <a:t>Thrust 3:  Verifiable</a:t>
-            </a:r>
-          </a:p>
-          <a:p>
-            <a:pPr algn="ctr"/>
-            <a:r>
-              <a:rPr sz="2000" b="1">
+              <a:t>Thrust 3:  </a:t>
+            </a:r>
+            <a:r>
+              <a:rPr lang="en-US" sz="1500" b="1" dirty="0">
                 <a:solidFill>
                   <a:srgbClr val="000000"/>
                 </a:solidFill>
                 <a:latin typeface="Times New Roman"/>
               </a:rPr>
-              <a:t>Compartmentalization and</a:t>
-            </a:r>
-          </a:p>
-          <a:p>
-            <a:pPr algn="ctr"/>
-            <a:r>
-              <a:rPr sz="2000" b="1">
-                <a:solidFill>
-                  <a:srgbClr val="000000"/>
-                </a:solidFill>
-                <a:latin typeface="Times New Roman"/>
-              </a:rPr>
-              <a:t>Trust Recovery</a:t>
-            </a:r>
-          </a:p>
-        </p:txBody>
-      </p:sp>
-      <p:sp>
-        <p:nvSpPr>
-          <p:cNvPr id="10" name="TextBox 9"/>
+              <a:t>Evidence-Guided Trust Containment and Recover</a:t>
+            </a:r>
+            <a:endParaRPr sz="1500" b="1" dirty="0">
+              <a:solidFill>
+                <a:srgbClr val="000000"/>
+              </a:solidFill>
+              <a:latin typeface="Times New Roman"/>
+            </a:endParaRPr>
+          </a:p>
+        </p:txBody>
+      </p:sp>
+      <p:sp>
+        <p:nvSpPr>
+          <p:cNvPr id="94" name="TextBox 93">
+            <a:extLst>
+              <a:ext uri="{FF2B5EF4-FFF2-40B4-BE49-F238E27FC236}">
+                <a16:creationId xmlns:a16="http://schemas.microsoft.com/office/drawing/2014/main" id="{52240F14-B80C-B108-FA0E-1860C2432A48}"/>
+              </a:ext>
+            </a:extLst>
+          </p:cNvPr>
           <p:cNvSpPr txBox="1"/>
           <p:nvPr/>
         </p:nvSpPr>
         <p:spPr>
           <a:xfrm>
-            <a:off x="8412480" y="1947672"/>
+            <a:off x="8053820" y="670772"/>
             <a:ext cx="3099816" cy="1097280"/>
           </a:xfrm>
           <a:prstGeom prst="rect">
@@ -3531,51 +3582,57 @@
           <a:p>
             <a:pPr algn="ctr"/>
             <a:r>
-              <a:rPr sz="1700">
+              <a:rPr lang="en-US" sz="1300" dirty="0">
                 <a:solidFill>
-                  <a:srgbClr val="000000"/>
+                  <a:srgbClr val="222222"/>
                 </a:solidFill>
                 <a:latin typeface="Times New Roman"/>
               </a:rPr>
-              <a:t>Verification-aware partitioning,</a:t>
+              <a:t>Verification-aware compartments</a:t>
             </a:r>
           </a:p>
           <a:p>
             <a:pPr algn="ctr"/>
             <a:r>
-              <a:rPr sz="1700">
+              <a:rPr lang="en-US" sz="1300" dirty="0">
                 <a:solidFill>
-                  <a:srgbClr val="000000"/>
+                  <a:srgbClr val="222222"/>
                 </a:solidFill>
                 <a:latin typeface="Times New Roman"/>
               </a:rPr>
-              <a:t>authenticated boundary enforcement,</a:t>
+              <a:t>Authenticated boundaries</a:t>
             </a:r>
           </a:p>
           <a:p>
             <a:pPr algn="ctr"/>
             <a:r>
-              <a:rPr sz="1700">
+              <a:rPr lang="en-US" sz="1300" dirty="0">
                 <a:solidFill>
-                  <a:srgbClr val="000000"/>
+                  <a:srgbClr val="222222"/>
                 </a:solidFill>
                 <a:latin typeface="Times New Roman"/>
               </a:rPr>
-              <a:t>selective recovery and re-attestation</a:t>
-            </a:r>
-          </a:p>
-        </p:txBody>
-      </p:sp>
-      <p:sp>
-        <p:nvSpPr>
-          <p:cNvPr id="11" name="Right Arrow 10"/>
+              <a:t>Selective recovery and re-attestation</a:t>
+            </a:r>
+          </a:p>
+        </p:txBody>
+      </p:sp>
+      <p:sp>
+        <p:nvSpPr>
+          <p:cNvPr id="95" name="Right Arrow 94">
+            <a:extLst>
+              <a:ext uri="{FF2B5EF4-FFF2-40B4-BE49-F238E27FC236}">
+                <a16:creationId xmlns:a16="http://schemas.microsoft.com/office/drawing/2014/main" id="{9239629B-00D0-E283-7DF6-EEFB6B06550E}"/>
+              </a:ext>
+            </a:extLst>
+          </p:cNvPr>
           <p:cNvSpPr/>
           <p:nvPr/>
         </p:nvSpPr>
         <p:spPr>
           <a:xfrm>
-            <a:off x="3822191" y="1993392"/>
-            <a:ext cx="457200" cy="164592"/>
+            <a:off x="3463528" y="692493"/>
+            <a:ext cx="457200" cy="164591"/>
           </a:xfrm>
           <a:prstGeom prst="rightArrow">
             <a:avLst/>
@@ -3614,14 +3671,20 @@
       </p:sp>
       <p:sp>
         <p:nvSpPr>
-          <p:cNvPr id="12" name="Right Arrow 11"/>
+          <p:cNvPr id="96" name="Right Arrow 95">
+            <a:extLst>
+              <a:ext uri="{FF2B5EF4-FFF2-40B4-BE49-F238E27FC236}">
+                <a16:creationId xmlns:a16="http://schemas.microsoft.com/office/drawing/2014/main" id="{59F35A62-26F5-1157-2152-6CDDA2F701DC}"/>
+              </a:ext>
+            </a:extLst>
+          </p:cNvPr>
           <p:cNvSpPr/>
           <p:nvPr/>
         </p:nvSpPr>
         <p:spPr>
           <a:xfrm>
-            <a:off x="7763256" y="1993392"/>
-            <a:ext cx="457200" cy="164592"/>
+            <a:off x="7404595" y="692493"/>
+            <a:ext cx="457200" cy="164591"/>
           </a:xfrm>
           <a:prstGeom prst="rightArrow">
             <a:avLst/>
@@ -3660,14 +3723,20 @@
       </p:sp>
       <p:sp>
         <p:nvSpPr>
-          <p:cNvPr id="13" name="Rounded Rectangle 12"/>
+          <p:cNvPr id="97" name="Rounded Rectangle 96">
+            <a:extLst>
+              <a:ext uri="{FF2B5EF4-FFF2-40B4-BE49-F238E27FC236}">
+                <a16:creationId xmlns:a16="http://schemas.microsoft.com/office/drawing/2014/main" id="{B10ED7FF-E884-FE13-288F-E2E83C71F245}"/>
+              </a:ext>
+            </a:extLst>
+          </p:cNvPr>
           <p:cNvSpPr/>
           <p:nvPr/>
         </p:nvSpPr>
         <p:spPr>
           <a:xfrm>
-            <a:off x="1417320" y="3977639"/>
-            <a:ext cx="9098280" cy="1600200"/>
+            <a:off x="25386" y="1861145"/>
+            <a:ext cx="11292840" cy="890858"/>
           </a:xfrm>
           <a:prstGeom prst="roundRect">
             <a:avLst/>
@@ -3706,14 +3775,20 @@
       </p:sp>
       <p:sp>
         <p:nvSpPr>
-          <p:cNvPr id="14" name="TextBox 13"/>
+          <p:cNvPr id="98" name="TextBox 97">
+            <a:extLst>
+              <a:ext uri="{FF2B5EF4-FFF2-40B4-BE49-F238E27FC236}">
+                <a16:creationId xmlns:a16="http://schemas.microsoft.com/office/drawing/2014/main" id="{2483794E-B3FF-D2B9-3B51-C5D8AFF69DDF}"/>
+              </a:ext>
+            </a:extLst>
+          </p:cNvPr>
           <p:cNvSpPr txBox="1"/>
           <p:nvPr/>
         </p:nvSpPr>
         <p:spPr>
           <a:xfrm>
-            <a:off x="1645920" y="4160519"/>
-            <a:ext cx="8641080" cy="1325880"/>
+            <a:off x="1287259" y="2216859"/>
+            <a:ext cx="8641080" cy="704089"/>
           </a:xfrm>
           <a:prstGeom prst="rect">
             <a:avLst/>
@@ -3728,383 +3803,44 @@
           <a:p>
             <a:pPr algn="ctr"/>
             <a:r>
-              <a:rPr sz="2100" b="1">
+              <a:rPr lang="en-US" sz="1300" dirty="0">
                 <a:solidFill>
-                  <a:srgbClr val="000000"/>
+                  <a:srgbClr val="222222"/>
                 </a:solidFill>
                 <a:latin typeface="Times New Roman"/>
               </a:rPr>
-              <a:t>Unified Trust Goal:</a:t>
-            </a:r>
-            <a:r>
-              <a:rPr sz="1800">
+              <a:t>Construct application-specific trusted environments; attest runtime behavior;</a:t>
+            </a:r>
+          </a:p>
+          <a:p>
+            <a:pPr algn="ctr"/>
+            <a:r>
+              <a:rPr lang="en-US" sz="1300" dirty="0">
                 <a:solidFill>
-                  <a:srgbClr val="000000"/>
+                  <a:srgbClr val="222222"/>
                 </a:solidFill>
                 <a:latin typeface="Times New Roman"/>
               </a:rPr>
-              <a:t>  prove that the correct hardware/software trust substrate was</a:t>
-            </a:r>
-          </a:p>
-          <a:p>
-            <a:pPr algn="ctr"/>
-            <a:r>
-              <a:rPr sz="1800">
-                <a:solidFill>
-                  <a:srgbClr val="000000"/>
-                </a:solidFill>
-                <a:latin typeface="Times New Roman"/>
-              </a:rPr>
-              <a:t>established, the correct runtime behavior and boundary events were attested,</a:t>
-            </a:r>
-          </a:p>
-          <a:p>
-            <a:pPr algn="ctr"/>
-            <a:r>
-              <a:rPr sz="1800">
-                <a:solidFill>
-                  <a:srgbClr val="000000"/>
-                </a:solidFill>
-                <a:latin typeface="Times New Roman"/>
-              </a:rPr>
-              <a:t>compromised components remained contained, and trusted service could be</a:t>
-            </a:r>
-          </a:p>
-          <a:p>
-            <a:pPr algn="ctr"/>
-            <a:r>
-              <a:rPr sz="1800">
-                <a:solidFill>
-                  <a:srgbClr val="000000"/>
-                </a:solidFill>
-                <a:latin typeface="Times New Roman"/>
-              </a:rPr>
-              <a:t>selectively recovered.</a:t>
-            </a:r>
-          </a:p>
-        </p:txBody>
-      </p:sp>
-      <p:sp>
-        <p:nvSpPr>
-          <p:cNvPr id="15" name="Straight Connector 14"/>
+              <a:t>contain localized compromise; and selectively recover affected domains.</a:t>
+            </a:r>
+          </a:p>
+        </p:txBody>
+      </p:sp>
+      <p:sp>
+        <p:nvSpPr>
+          <p:cNvPr id="99" name="Straight Connector 98">
+            <a:extLst>
+              <a:ext uri="{FF2B5EF4-FFF2-40B4-BE49-F238E27FC236}">
+                <a16:creationId xmlns:a16="http://schemas.microsoft.com/office/drawing/2014/main" id="{14D48EFA-95F9-DA36-32A3-31954BD9B053}"/>
+              </a:ext>
+            </a:extLst>
+          </p:cNvPr>
           <p:cNvSpPr/>
           <p:nvPr/>
         </p:nvSpPr>
         <p:spPr>
           <a:xfrm>
-            <a:off x="2029968" y="3200400"/>
-            <a:ext cx="0" cy="384048"/>
-          </a:xfrm>
-          <a:prstGeom prst="lineInv">
-            <a:avLst/>
-          </a:prstGeom>
-          <a:noFill/>
-          <a:ln w="15875">
-            <a:solidFill>
-              <a:srgbClr val="000000"/>
-            </a:solidFill>
-          </a:ln>
-        </p:spPr>
-        <p:style>
-          <a:lnRef idx="1">
-            <a:schemeClr val="accent1"/>
-          </a:lnRef>
-          <a:fillRef idx="3">
-            <a:schemeClr val="accent1"/>
-          </a:fillRef>
-          <a:effectRef idx="2">
-            <a:schemeClr val="accent1"/>
-          </a:effectRef>
-          <a:fontRef idx="minor">
-            <a:schemeClr val="lt1"/>
-          </a:fontRef>
-        </p:style>
-        <p:txBody>
-          <a:bodyPr rtlCol="0" anchor="ctr"/>
-          <a:lstStyle/>
-          <a:p>
-            <a:pPr algn="ctr"/>
-            <a:endParaRPr/>
-          </a:p>
-        </p:txBody>
-      </p:sp>
-      <p:sp>
-        <p:nvSpPr>
-          <p:cNvPr id="16" name="Straight Connector 15"/>
-          <p:cNvSpPr/>
-          <p:nvPr/>
-        </p:nvSpPr>
-        <p:spPr>
-          <a:xfrm>
-            <a:off x="2029968" y="3584448"/>
-            <a:ext cx="576072" cy="0"/>
-          </a:xfrm>
-          <a:prstGeom prst="lineInv">
-            <a:avLst/>
-          </a:prstGeom>
-          <a:noFill/>
-          <a:ln w="15875">
-            <a:solidFill>
-              <a:srgbClr val="000000"/>
-            </a:solidFill>
-          </a:ln>
-        </p:spPr>
-        <p:style>
-          <a:lnRef idx="1">
-            <a:schemeClr val="accent1"/>
-          </a:lnRef>
-          <a:fillRef idx="3">
-            <a:schemeClr val="accent1"/>
-          </a:fillRef>
-          <a:effectRef idx="2">
-            <a:schemeClr val="accent1"/>
-          </a:effectRef>
-          <a:fontRef idx="minor">
-            <a:schemeClr val="lt1"/>
-          </a:fontRef>
-        </p:style>
-        <p:txBody>
-          <a:bodyPr rtlCol="0" anchor="ctr"/>
-          <a:lstStyle/>
-          <a:p>
-            <a:pPr algn="ctr"/>
-            <a:endParaRPr/>
-          </a:p>
-        </p:txBody>
-      </p:sp>
-      <p:sp>
-        <p:nvSpPr>
-          <p:cNvPr id="17" name="Straight Connector 16"/>
-          <p:cNvSpPr/>
-          <p:nvPr/>
-        </p:nvSpPr>
-        <p:spPr>
-          <a:xfrm>
-            <a:off x="2606040" y="3584448"/>
-            <a:ext cx="0" cy="219456"/>
-          </a:xfrm>
-          <a:prstGeom prst="lineInv">
-            <a:avLst/>
-          </a:prstGeom>
-          <a:noFill/>
-          <a:ln w="15875">
-            <a:solidFill>
-              <a:srgbClr val="000000"/>
-            </a:solidFill>
-          </a:ln>
-        </p:spPr>
-        <p:style>
-          <a:lnRef idx="1">
-            <a:schemeClr val="accent1"/>
-          </a:lnRef>
-          <a:fillRef idx="3">
-            <a:schemeClr val="accent1"/>
-          </a:fillRef>
-          <a:effectRef idx="2">
-            <a:schemeClr val="accent1"/>
-          </a:effectRef>
-          <a:fontRef idx="minor">
-            <a:schemeClr val="lt1"/>
-          </a:fontRef>
-        </p:style>
-        <p:txBody>
-          <a:bodyPr rtlCol="0" anchor="ctr"/>
-          <a:lstStyle/>
-          <a:p>
-            <a:pPr algn="ctr"/>
-            <a:endParaRPr/>
-          </a:p>
-        </p:txBody>
-      </p:sp>
-      <p:sp>
-        <p:nvSpPr>
-          <p:cNvPr id="18" name="Down Arrow 17"/>
-          <p:cNvSpPr/>
-          <p:nvPr/>
-        </p:nvSpPr>
-        <p:spPr>
-          <a:xfrm>
-            <a:off x="2523744" y="3712463"/>
-            <a:ext cx="164592" cy="347472"/>
-          </a:xfrm>
-          <a:prstGeom prst="downArrow">
-            <a:avLst/>
-          </a:prstGeom>
-          <a:solidFill>
-            <a:srgbClr val="000000"/>
-          </a:solidFill>
-          <a:ln>
-            <a:solidFill>
-              <a:srgbClr val="000000"/>
-            </a:solidFill>
-          </a:ln>
-        </p:spPr>
-        <p:style>
-          <a:lnRef idx="1">
-            <a:schemeClr val="accent1"/>
-          </a:lnRef>
-          <a:fillRef idx="3">
-            <a:schemeClr val="accent1"/>
-          </a:fillRef>
-          <a:effectRef idx="2">
-            <a:schemeClr val="accent1"/>
-          </a:effectRef>
-          <a:fontRef idx="minor">
-            <a:schemeClr val="lt1"/>
-          </a:fontRef>
-        </p:style>
-        <p:txBody>
-          <a:bodyPr rtlCol="0" anchor="ctr"/>
-          <a:lstStyle/>
-          <a:p>
-            <a:pPr algn="ctr"/>
-            <a:endParaRPr/>
-          </a:p>
-        </p:txBody>
-      </p:sp>
-      <p:sp>
-        <p:nvSpPr>
-          <p:cNvPr id="19" name="Straight Connector 18"/>
-          <p:cNvSpPr/>
-          <p:nvPr/>
-        </p:nvSpPr>
-        <p:spPr>
-          <a:xfrm>
-            <a:off x="6035040" y="3200400"/>
-            <a:ext cx="0" cy="603504"/>
-          </a:xfrm>
-          <a:prstGeom prst="lineInv">
-            <a:avLst/>
-          </a:prstGeom>
-          <a:noFill/>
-          <a:ln w="15875">
-            <a:solidFill>
-              <a:srgbClr val="000000"/>
-            </a:solidFill>
-          </a:ln>
-        </p:spPr>
-        <p:style>
-          <a:lnRef idx="1">
-            <a:schemeClr val="accent1"/>
-          </a:lnRef>
-          <a:fillRef idx="3">
-            <a:schemeClr val="accent1"/>
-          </a:fillRef>
-          <a:effectRef idx="2">
-            <a:schemeClr val="accent1"/>
-          </a:effectRef>
-          <a:fontRef idx="minor">
-            <a:schemeClr val="lt1"/>
-          </a:fontRef>
-        </p:style>
-        <p:txBody>
-          <a:bodyPr rtlCol="0" anchor="ctr"/>
-          <a:lstStyle/>
-          <a:p>
-            <a:pPr algn="ctr"/>
-            <a:endParaRPr/>
-          </a:p>
-        </p:txBody>
-      </p:sp>
-      <p:sp>
-        <p:nvSpPr>
-          <p:cNvPr id="20" name="Down Arrow 19"/>
-          <p:cNvSpPr/>
-          <p:nvPr/>
-        </p:nvSpPr>
-        <p:spPr>
-          <a:xfrm>
-            <a:off x="5952744" y="3712463"/>
-            <a:ext cx="164592" cy="347472"/>
-          </a:xfrm>
-          <a:prstGeom prst="downArrow">
-            <a:avLst/>
-          </a:prstGeom>
-          <a:solidFill>
-            <a:srgbClr val="000000"/>
-          </a:solidFill>
-          <a:ln>
-            <a:solidFill>
-              <a:srgbClr val="000000"/>
-            </a:solidFill>
-          </a:ln>
-        </p:spPr>
-        <p:style>
-          <a:lnRef idx="1">
-            <a:schemeClr val="accent1"/>
-          </a:lnRef>
-          <a:fillRef idx="3">
-            <a:schemeClr val="accent1"/>
-          </a:fillRef>
-          <a:effectRef idx="2">
-            <a:schemeClr val="accent1"/>
-          </a:effectRef>
-          <a:fontRef idx="minor">
-            <a:schemeClr val="lt1"/>
-          </a:fontRef>
-        </p:style>
-        <p:txBody>
-          <a:bodyPr rtlCol="0" anchor="ctr"/>
-          <a:lstStyle/>
-          <a:p>
-            <a:pPr algn="ctr"/>
-            <a:endParaRPr/>
-          </a:p>
-        </p:txBody>
-      </p:sp>
-      <p:sp>
-        <p:nvSpPr>
-          <p:cNvPr id="21" name="Straight Connector 20"/>
-          <p:cNvSpPr/>
-          <p:nvPr/>
-        </p:nvSpPr>
-        <p:spPr>
-          <a:xfrm>
-            <a:off x="9966960" y="3200400"/>
-            <a:ext cx="0" cy="384048"/>
-          </a:xfrm>
-          <a:prstGeom prst="lineInv">
-            <a:avLst/>
-          </a:prstGeom>
-          <a:noFill/>
-          <a:ln w="15875">
-            <a:solidFill>
-              <a:srgbClr val="000000"/>
-            </a:solidFill>
-          </a:ln>
-        </p:spPr>
-        <p:style>
-          <a:lnRef idx="1">
-            <a:schemeClr val="accent1"/>
-          </a:lnRef>
-          <a:fillRef idx="3">
-            <a:schemeClr val="accent1"/>
-          </a:fillRef>
-          <a:effectRef idx="2">
-            <a:schemeClr val="accent1"/>
-          </a:effectRef>
-          <a:fontRef idx="minor">
-            <a:schemeClr val="lt1"/>
-          </a:fontRef>
-        </p:style>
-        <p:txBody>
-          <a:bodyPr rtlCol="0" anchor="ctr"/>
-          <a:lstStyle/>
-          <a:p>
-            <a:pPr algn="ctr"/>
-            <a:endParaRPr/>
-          </a:p>
-        </p:txBody>
-      </p:sp>
-      <p:sp>
-        <p:nvSpPr>
-          <p:cNvPr id="22" name="Straight Connector 21"/>
-          <p:cNvSpPr/>
-          <p:nvPr/>
-        </p:nvSpPr>
-        <p:spPr>
-          <a:xfrm>
-            <a:off x="9966960" y="3584448"/>
+            <a:off x="9608299" y="1467954"/>
             <a:ext cx="0" cy="0"/>
           </a:xfrm>
           <a:prstGeom prst="lineInv">
@@ -4142,22 +3878,71 @@
       </p:sp>
       <p:sp>
         <p:nvSpPr>
-          <p:cNvPr id="23" name="Straight Connector 22"/>
-          <p:cNvSpPr/>
+          <p:cNvPr id="100" name="TextBox 99">
+            <a:extLst>
+              <a:ext uri="{FF2B5EF4-FFF2-40B4-BE49-F238E27FC236}">
+                <a16:creationId xmlns:a16="http://schemas.microsoft.com/office/drawing/2014/main" id="{F4A75EA8-6BD3-6AE1-0526-09E8767F4882}"/>
+              </a:ext>
+            </a:extLst>
+          </p:cNvPr>
+          <p:cNvSpPr txBox="1"/>
           <p:nvPr/>
         </p:nvSpPr>
         <p:spPr>
           <a:xfrm>
-            <a:off x="9390888" y="3584448"/>
-            <a:ext cx="0" cy="219456"/>
+            <a:off x="784339" y="1922793"/>
+            <a:ext cx="9921240" cy="310896"/>
           </a:xfrm>
-          <a:prstGeom prst="lineInv">
+          <a:prstGeom prst="rect">
             <a:avLst/>
           </a:prstGeom>
           <a:noFill/>
-          <a:ln w="15875">
+        </p:spPr>
+        <p:txBody>
+          <a:bodyPr wrap="square">
+            <a:noAutofit/>
+          </a:bodyPr>
+          <a:lstStyle/>
+          <a:p>
+            <a:pPr algn="ctr"/>
+            <a:r>
+              <a:rPr sz="1500" b="1" dirty="0">
+                <a:solidFill>
+                  <a:srgbClr val="192734"/>
+                </a:solidFill>
+                <a:latin typeface="Times New Roman"/>
+              </a:rPr>
+              <a:t>Unified Trust Lifecycle</a:t>
+            </a:r>
+          </a:p>
+        </p:txBody>
+      </p:sp>
+      <p:sp>
+        <p:nvSpPr>
+          <p:cNvPr id="101" name="Down Arrow 100">
+            <a:extLst>
+              <a:ext uri="{FF2B5EF4-FFF2-40B4-BE49-F238E27FC236}">
+                <a16:creationId xmlns:a16="http://schemas.microsoft.com/office/drawing/2014/main" id="{47E6AF4A-A496-18B7-8ABE-3CB1C82695FA}"/>
+              </a:ext>
+            </a:extLst>
+          </p:cNvPr>
+          <p:cNvSpPr/>
+          <p:nvPr/>
+        </p:nvSpPr>
+        <p:spPr>
+          <a:xfrm>
+            <a:off x="1657592" y="1516596"/>
+            <a:ext cx="164591" cy="333122"/>
+          </a:xfrm>
+          <a:prstGeom prst="downArrow">
+            <a:avLst/>
+          </a:prstGeom>
+          <a:solidFill>
+            <a:schemeClr val="tx1"/>
+          </a:solidFill>
+          <a:ln>
             <a:solidFill>
-              <a:srgbClr val="000000"/>
+              <a:schemeClr val="tx1"/>
             </a:solidFill>
           </a:ln>
         </p:spPr>
@@ -4180,30 +3965,36 @@
           <a:lstStyle/>
           <a:p>
             <a:pPr algn="ctr"/>
-            <a:endParaRPr/>
-          </a:p>
-        </p:txBody>
-      </p:sp>
-      <p:sp>
-        <p:nvSpPr>
-          <p:cNvPr id="24" name="Down Arrow 23"/>
+            <a:endParaRPr lang="en-US"/>
+          </a:p>
+        </p:txBody>
+      </p:sp>
+      <p:sp>
+        <p:nvSpPr>
+          <p:cNvPr id="102" name="Down Arrow 101">
+            <a:extLst>
+              <a:ext uri="{FF2B5EF4-FFF2-40B4-BE49-F238E27FC236}">
+                <a16:creationId xmlns:a16="http://schemas.microsoft.com/office/drawing/2014/main" id="{41B2D7C1-217E-7F06-A5B3-50D1A55AD0FF}"/>
+              </a:ext>
+            </a:extLst>
+          </p:cNvPr>
           <p:cNvSpPr/>
           <p:nvPr/>
         </p:nvSpPr>
         <p:spPr>
           <a:xfrm>
-            <a:off x="9308592" y="3712463"/>
-            <a:ext cx="164592" cy="347472"/>
+            <a:off x="5598661" y="1516596"/>
+            <a:ext cx="164591" cy="333122"/>
           </a:xfrm>
           <a:prstGeom prst="downArrow">
             <a:avLst/>
           </a:prstGeom>
           <a:solidFill>
-            <a:srgbClr val="000000"/>
+            <a:schemeClr val="tx1"/>
           </a:solidFill>
           <a:ln>
             <a:solidFill>
-              <a:srgbClr val="000000"/>
+              <a:schemeClr val="tx1"/>
             </a:solidFill>
           </a:ln>
         </p:spPr>
@@ -4226,7 +4017,59 @@
           <a:lstStyle/>
           <a:p>
             <a:pPr algn="ctr"/>
-            <a:endParaRPr/>
+            <a:endParaRPr lang="en-US"/>
+          </a:p>
+        </p:txBody>
+      </p:sp>
+      <p:sp>
+        <p:nvSpPr>
+          <p:cNvPr id="103" name="Down Arrow 102">
+            <a:extLst>
+              <a:ext uri="{FF2B5EF4-FFF2-40B4-BE49-F238E27FC236}">
+                <a16:creationId xmlns:a16="http://schemas.microsoft.com/office/drawing/2014/main" id="{71DB64A9-DB4F-CCC1-E1EE-CB912EB8F7F8}"/>
+              </a:ext>
+            </a:extLst>
+          </p:cNvPr>
+          <p:cNvSpPr/>
+          <p:nvPr/>
+        </p:nvSpPr>
+        <p:spPr>
+          <a:xfrm>
+            <a:off x="9521432" y="1516596"/>
+            <a:ext cx="164591" cy="333122"/>
+          </a:xfrm>
+          <a:prstGeom prst="downArrow">
+            <a:avLst/>
+          </a:prstGeom>
+          <a:solidFill>
+            <a:schemeClr val="tx1"/>
+          </a:solidFill>
+          <a:ln>
+            <a:solidFill>
+              <a:schemeClr val="tx1"/>
+            </a:solidFill>
+          </a:ln>
+        </p:spPr>
+        <p:style>
+          <a:lnRef idx="1">
+            <a:schemeClr val="accent1"/>
+          </a:lnRef>
+          <a:fillRef idx="3">
+            <a:schemeClr val="accent1"/>
+          </a:fillRef>
+          <a:effectRef idx="2">
+            <a:schemeClr val="accent1"/>
+          </a:effectRef>
+          <a:fontRef idx="minor">
+            <a:schemeClr val="lt1"/>
+          </a:fontRef>
+        </p:style>
+        <p:txBody>
+          <a:bodyPr rtlCol="0" anchor="ctr"/>
+          <a:lstStyle/>
+          <a:p>
+            <a:pPr algn="ctr"/>
+            <a:endParaRPr lang="en-US"/>
           </a:p>
         </p:txBody>
       </p:sp>

--- a/figs/VEST_thrusts.pptx
+++ b/figs/VEST_thrusts.pptx
@@ -302,7 +302,7 @@
           <a:p>
             <a:fld id="{5BCAD085-E8A6-8845-BD4E-CB4CCA059FC4}" type="datetimeFigureOut">
               <a:rPr lang="en-US" smtClean="0"/>
-              <a:t>7/22/26</a:t>
+              <a:t>8/17/26</a:t>
             </a:fld>
             <a:endParaRPr lang="en-US"/>
           </a:p>
@@ -470,7 +470,7 @@
           <a:p>
             <a:fld id="{5BCAD085-E8A6-8845-BD4E-CB4CCA059FC4}" type="datetimeFigureOut">
               <a:rPr lang="en-US" smtClean="0"/>
-              <a:t>7/22/26</a:t>
+              <a:t>8/17/26</a:t>
             </a:fld>
             <a:endParaRPr lang="en-US"/>
           </a:p>
@@ -648,7 +648,7 @@
           <a:p>
             <a:fld id="{5BCAD085-E8A6-8845-BD4E-CB4CCA059FC4}" type="datetimeFigureOut">
               <a:rPr lang="en-US" smtClean="0"/>
-              <a:t>7/22/26</a:t>
+              <a:t>8/17/26</a:t>
             </a:fld>
             <a:endParaRPr lang="en-US"/>
           </a:p>
@@ -816,7 +816,7 @@
           <a:p>
             <a:fld id="{5BCAD085-E8A6-8845-BD4E-CB4CCA059FC4}" type="datetimeFigureOut">
               <a:rPr lang="en-US" smtClean="0"/>
-              <a:t>7/22/26</a:t>
+              <a:t>8/17/26</a:t>
             </a:fld>
             <a:endParaRPr lang="en-US"/>
           </a:p>
@@ -1061,7 +1061,7 @@
           <a:p>
             <a:fld id="{5BCAD085-E8A6-8845-BD4E-CB4CCA059FC4}" type="datetimeFigureOut">
               <a:rPr lang="en-US" smtClean="0"/>
-              <a:t>7/22/26</a:t>
+              <a:t>8/17/26</a:t>
             </a:fld>
             <a:endParaRPr lang="en-US"/>
           </a:p>
@@ -1346,7 +1346,7 @@
           <a:p>
             <a:fld id="{5BCAD085-E8A6-8845-BD4E-CB4CCA059FC4}" type="datetimeFigureOut">
               <a:rPr lang="en-US" smtClean="0"/>
-              <a:t>7/22/26</a:t>
+              <a:t>8/17/26</a:t>
             </a:fld>
             <a:endParaRPr lang="en-US"/>
           </a:p>
@@ -1765,7 +1765,7 @@
           <a:p>
             <a:fld id="{5BCAD085-E8A6-8845-BD4E-CB4CCA059FC4}" type="datetimeFigureOut">
               <a:rPr lang="en-US" smtClean="0"/>
-              <a:t>7/22/26</a:t>
+              <a:t>8/17/26</a:t>
             </a:fld>
             <a:endParaRPr lang="en-US"/>
           </a:p>
@@ -1882,7 +1882,7 @@
           <a:p>
             <a:fld id="{5BCAD085-E8A6-8845-BD4E-CB4CCA059FC4}" type="datetimeFigureOut">
               <a:rPr lang="en-US" smtClean="0"/>
-              <a:t>7/22/26</a:t>
+              <a:t>8/17/26</a:t>
             </a:fld>
             <a:endParaRPr lang="en-US"/>
           </a:p>
@@ -1977,7 +1977,7 @@
           <a:p>
             <a:fld id="{5BCAD085-E8A6-8845-BD4E-CB4CCA059FC4}" type="datetimeFigureOut">
               <a:rPr lang="en-US" smtClean="0"/>
-              <a:t>7/22/26</a:t>
+              <a:t>8/17/26</a:t>
             </a:fld>
             <a:endParaRPr lang="en-US"/>
           </a:p>
@@ -2252,7 +2252,7 @@
           <a:p>
             <a:fld id="{5BCAD085-E8A6-8845-BD4E-CB4CCA059FC4}" type="datetimeFigureOut">
               <a:rPr lang="en-US" smtClean="0"/>
-              <a:t>7/22/26</a:t>
+              <a:t>8/17/26</a:t>
             </a:fld>
             <a:endParaRPr lang="en-US"/>
           </a:p>
@@ -2504,7 +2504,7 @@
           <a:p>
             <a:fld id="{5BCAD085-E8A6-8845-BD4E-CB4CCA059FC4}" type="datetimeFigureOut">
               <a:rPr lang="en-US" smtClean="0"/>
-              <a:t>7/22/26</a:t>
+              <a:t>8/17/26</a:t>
             </a:fld>
             <a:endParaRPr lang="en-US"/>
           </a:p>
@@ -2715,7 +2715,7 @@
           <a:p>
             <a:fld id="{5BCAD085-E8A6-8845-BD4E-CB4CCA059FC4}" type="datetimeFigureOut">
               <a:rPr lang="en-US" smtClean="0"/>
-              <a:t>7/22/26</a:t>
+              <a:t>8/17/26</a:t>
             </a:fld>
             <a:endParaRPr lang="en-US"/>
           </a:p>
@@ -3221,7 +3221,7 @@
         <p:spPr>
           <a:xfrm>
             <a:off x="189980" y="670772"/>
-            <a:ext cx="3099816" cy="715720"/>
+            <a:ext cx="3163820" cy="715720"/>
           </a:xfrm>
           <a:prstGeom prst="rect">
             <a:avLst/>
@@ -3230,11 +3230,14 @@
         </p:spPr>
         <p:txBody>
           <a:bodyPr wrap="square">
-            <a:normAutofit/>
+            <a:normAutofit fontScale="92500"/>
           </a:bodyPr>
           <a:lstStyle/>
           <a:p>
-            <a:pPr algn="ctr"/>
+            <a:pPr marL="285750" indent="-285750">
+              <a:buFont typeface="Arial" panose="020B0604020202020204" pitchFamily="34" charset="0"/>
+              <a:buChar char="•"/>
+            </a:pPr>
             <a:r>
               <a:rPr lang="en-US" sz="1300" dirty="0">
                 <a:solidFill>
@@ -3246,7 +3249,10 @@
             </a:r>
           </a:p>
           <a:p>
-            <a:pPr algn="ctr"/>
+            <a:pPr marL="285750" indent="-285750">
+              <a:buFont typeface="Arial" panose="020B0604020202020204" pitchFamily="34" charset="0"/>
+              <a:buChar char="•"/>
+            </a:pPr>
             <a:r>
               <a:rPr lang="en-US" sz="1300" dirty="0">
                 <a:solidFill>
@@ -3258,7 +3264,10 @@
             </a:r>
           </a:p>
           <a:p>
-            <a:pPr algn="ctr"/>
+            <a:pPr marL="285750" indent="-285750">
+              <a:buFont typeface="Arial" panose="020B0604020202020204" pitchFamily="34" charset="0"/>
+              <a:buChar char="•"/>
+            </a:pPr>
             <a:r>
               <a:rPr lang="en-US" sz="1300" dirty="0">
                 <a:solidFill>
@@ -3393,8 +3402,8 @@
         </p:nvSpPr>
         <p:spPr>
           <a:xfrm>
-            <a:off x="4131042" y="670772"/>
-            <a:ext cx="3099816" cy="715720"/>
+            <a:off x="4131041" y="670772"/>
+            <a:ext cx="3182111" cy="715720"/>
           </a:xfrm>
           <a:prstGeom prst="rect">
             <a:avLst/>
@@ -3407,7 +3416,10 @@
           </a:bodyPr>
           <a:lstStyle/>
           <a:p>
-            <a:pPr algn="ctr"/>
+            <a:pPr marL="285750" indent="-285750">
+              <a:buFont typeface="Arial" panose="020B0604020202020204" pitchFamily="34" charset="0"/>
+              <a:buChar char="•"/>
+            </a:pPr>
             <a:r>
               <a:rPr lang="en-US" sz="1300" dirty="0">
                 <a:solidFill>
@@ -3419,7 +3431,10 @@
             </a:r>
           </a:p>
           <a:p>
-            <a:pPr algn="ctr"/>
+            <a:pPr marL="285750" indent="-285750">
+              <a:buFont typeface="Arial" panose="020B0604020202020204" pitchFamily="34" charset="0"/>
+              <a:buChar char="•"/>
+            </a:pPr>
             <a:r>
               <a:rPr lang="en-US" sz="1300" dirty="0">
                 <a:solidFill>
@@ -3431,7 +3446,10 @@
             </a:r>
           </a:p>
           <a:p>
-            <a:pPr algn="ctr"/>
+            <a:pPr marL="285750" indent="-285750">
+              <a:buFont typeface="Arial" panose="020B0604020202020204" pitchFamily="34" charset="0"/>
+              <a:buChar char="•"/>
+            </a:pPr>
             <a:r>
               <a:rPr lang="en-US" sz="1300" dirty="0">
                 <a:solidFill>
@@ -3580,7 +3598,10 @@
           </a:bodyPr>
           <a:lstStyle/>
           <a:p>
-            <a:pPr algn="ctr"/>
+            <a:pPr marL="285750" indent="-285750">
+              <a:buFont typeface="Arial" panose="020B0604020202020204" pitchFamily="34" charset="0"/>
+              <a:buChar char="•"/>
+            </a:pPr>
             <a:r>
               <a:rPr lang="en-US" sz="1300" dirty="0">
                 <a:solidFill>
@@ -3592,7 +3613,10 @@
             </a:r>
           </a:p>
           <a:p>
-            <a:pPr algn="ctr"/>
+            <a:pPr marL="285750" indent="-285750">
+              <a:buFont typeface="Arial" panose="020B0604020202020204" pitchFamily="34" charset="0"/>
+              <a:buChar char="•"/>
+            </a:pPr>
             <a:r>
               <a:rPr lang="en-US" sz="1300" dirty="0">
                 <a:solidFill>
@@ -3604,7 +3628,10 @@
             </a:r>
           </a:p>
           <a:p>
-            <a:pPr algn="ctr"/>
+            <a:pPr marL="285750" indent="-285750">
+              <a:buFont typeface="Arial" panose="020B0604020202020204" pitchFamily="34" charset="0"/>
+              <a:buChar char="•"/>
+            </a:pPr>
             <a:r>
               <a:rPr lang="en-US" sz="1300" dirty="0">
                 <a:solidFill>
